--- a/it/slides/09-Architettura_dei_Calcolatori-Algebra_di_Boole_2.pptx
+++ b/it/slides/09-Architettura_dei_Calcolatori-Algebra_di_Boole_2.pptx
@@ -126,13 +126,13 @@
   <p:extLst>
     <p:ext uri="{521415D9-36F7-43E2-AB2F-B90AF26B5E84}">
       <p14:sectionLst xmlns:p14="http://schemas.microsoft.com/office/powerpoint/2010/main">
-        <p14:section name="Apertura" id="{46b90a08-68d1-a7b8-fc50-73554980e669}">
+        <p14:section name="Apertura" id="{f2536d1c-7ecd-461e-fdc2-8456515afb3c}">
           <p14:sldIdLst>
             <p14:sldId id="256"/>
             <p14:sldId id="257"/>
           </p14:sldIdLst>
         </p14:section>
-        <p14:section name="Funzioni booleane" id="{9884f122-a15f-b370-4aba-2268c796153c}">
+        <p14:section name="Funzioni booleane" id="{391ed998-c647-14b1-f6f3-80284c4d56d6}">
           <p14:sldIdLst>
             <p14:sldId id="258"/>
             <p14:sldId id="259"/>
@@ -142,14 +142,14 @@
             <p14:sldId id="263"/>
           </p14:sldIdLst>
         </p14:section>
-        <p14:section name="Forme canoniche" id="{f24ec543-45c9-c365-9aed-1de19a30a742}">
+        <p14:section name="Forme canoniche" id="{3d850f5b-23a9-8fa9-b4a6-43a6e04ad808}">
           <p14:sldIdLst>
             <p14:sldId id="264"/>
             <p14:sldId id="265"/>
             <p14:sldId id="266"/>
           </p14:sldIdLst>
         </p14:section>
-        <p14:section name="Mappe di Karnaugh" id="{c0821ce3-dfa9-d4e5-43ff-b20dcc3dc9bb}">
+        <p14:section name="Mappe di Karnaugh" id="{12b6552d-13c0-e075-a249-3749ba163127}">
           <p14:sldIdLst>
             <p14:sldId id="267"/>
             <p14:sldId id="268"/>
@@ -157,7 +157,7 @@
             <p14:sldId id="270"/>
           </p14:sldIdLst>
         </p14:section>
-        <p14:section name="Ritorno alla macchina" id="{7ccc5f8f-8ce8-f81f-1278-46432f0de54e}">
+        <p14:section name="Ritorno alla macchina" id="{b7cc8e01-37b8-9b64-23dc-40aea7782046}">
           <p14:sldIdLst>
             <p14:sldId id="271"/>
             <p14:sldId id="272"/>
@@ -3294,7 +3294,63 @@
       </p:sp>
       <p:sp>
         <p:nvSpPr>
-          <p:cNvPr id="12" name="Shape 10"/>
+          <p:cNvPr id="12" name="Text 10"/>
+          <p:cNvSpPr txBox="1"/>
+          <p:nvPr/>
+        </p:nvSpPr>
+        <p:spPr>
+          <a:xfrm>
+            <a:off x="4693615" y="566928"/>
+            <a:ext cx="6949440" cy="640080"/>
+          </a:xfrm>
+          <a:prstGeom prst="rect">
+            <a:avLst/>
+          </a:prstGeom>
+          <a:noFill/>
+          <a:ln/>
+        </p:spPr>
+        <p:txBody>
+          <a:bodyPr wrap="square" lIns="0" tIns="0" rIns="0" bIns="0" rtlCol="0" anchor="t"/>
+          <a:lstStyle/>
+          <a:p>
+            <a:pPr algn="r" indent="0" marL="0">
+              <a:buNone/>
+            </a:pPr>
+            <a:r>
+              <a:rPr lang="en-US" sz="1300" dirty="0">
+                <a:solidFill>
+                  <a:srgbClr val="CFE3EA"/>
+                </a:solidFill>
+                <a:latin typeface="Calibri" pitchFamily="34" charset="0"/>
+                <a:ea typeface="Calibri" pitchFamily="34" charset="-122"/>
+                <a:cs typeface="Calibri" pitchFamily="34" charset="-120"/>
+              </a:rPr>
+              <a:t>Presentazione della lezione. I listati, il programma completo e come provarlo sono nella presentazione del codice:</a:t>
+            </a:r>
+            <a:endParaRPr lang="en-US" sz="1300" dirty="0"/>
+          </a:p>
+          <a:p>
+            <a:pPr algn="r" indent="0" marL="0">
+              <a:buNone/>
+            </a:pPr>
+            <a:r>
+              <a:rPr lang="en-US" sz="1300" dirty="0">
+                <a:solidFill>
+                  <a:srgbClr val="CFE3EA"/>
+                </a:solidFill>
+                <a:latin typeface="Calibri" pitchFamily="34" charset="0"/>
+                <a:ea typeface="Calibri" pitchFamily="34" charset="-122"/>
+                <a:cs typeface="Calibri" pitchFamily="34" charset="-120"/>
+              </a:rPr>
+              <a:t>09-Architettura_dei_Calcolatori-Algebra_di_Boole_2-Codice.pptx</a:t>
+            </a:r>
+            <a:endParaRPr lang="en-US" sz="1300" dirty="0"/>
+          </a:p>
+        </p:txBody>
+      </p:sp>
+      <p:sp>
+        <p:nvSpPr>
+          <p:cNvPr id="13" name="Shape 11"/>
           <p:cNvSpPr/>
           <p:nvPr/>
         </p:nvSpPr>
@@ -3321,7 +3377,7 @@
       </p:sp>
       <p:pic>
         <p:nvPicPr>
-          <p:cNvPr id="13" name="Image 0" descr="/Users/raffaelemontella/devel/riscv-prg32/computer-architecture-with-prg32/tools/assets/game_tetris.png">    </p:cNvPr>
+          <p:cNvPr id="14" name="Image 0" descr="/Users/raffaelemontella/devel/riscv-prg32/computer-architecture-with-prg32/tools/assets/game_tetris.png">    </p:cNvPr>
           <p:cNvPicPr>
             <a:picLocks noChangeAspect="1"/>
           </p:cNvPicPr>

--- a/it/slides/09-Architettura_dei_Calcolatori-Algebra_di_Boole_2.pptx
+++ b/it/slides/09-Architettura_dei_Calcolatori-Algebra_di_Boole_2.pptx
@@ -126,13 +126,13 @@
   <p:extLst>
     <p:ext uri="{521415D9-36F7-43E2-AB2F-B90AF26B5E84}">
       <p14:sectionLst xmlns:p14="http://schemas.microsoft.com/office/powerpoint/2010/main">
-        <p14:section name="Apertura" id="{f2536d1c-7ecd-461e-fdc2-8456515afb3c}">
+        <p14:section name="Apertura" id="{78358b13-a4f0-c2c7-d57a-b015eb1ffc94}">
           <p14:sldIdLst>
             <p14:sldId id="256"/>
             <p14:sldId id="257"/>
           </p14:sldIdLst>
         </p14:section>
-        <p14:section name="Funzioni booleane" id="{391ed998-c647-14b1-f6f3-80284c4d56d6}">
+        <p14:section name="Funzioni booleane" id="{8d10bba1-39ec-1c2b-e777-37ea1a336ed4}">
           <p14:sldIdLst>
             <p14:sldId id="258"/>
             <p14:sldId id="259"/>
@@ -142,14 +142,14 @@
             <p14:sldId id="263"/>
           </p14:sldIdLst>
         </p14:section>
-        <p14:section name="Forme canoniche" id="{3d850f5b-23a9-8fa9-b4a6-43a6e04ad808}">
+        <p14:section name="Forme canoniche" id="{588ad467-a63a-5940-5753-67f3672daa1e}">
           <p14:sldIdLst>
             <p14:sldId id="264"/>
             <p14:sldId id="265"/>
             <p14:sldId id="266"/>
           </p14:sldIdLst>
         </p14:section>
-        <p14:section name="Mappe di Karnaugh" id="{12b6552d-13c0-e075-a249-3749ba163127}">
+        <p14:section name="Mappe di Karnaugh" id="{b9fac1b2-6965-1b3e-b1a4-d2f26a268ea3}">
           <p14:sldIdLst>
             <p14:sldId id="267"/>
             <p14:sldId id="268"/>
@@ -157,7 +157,7 @@
             <p14:sldId id="270"/>
           </p14:sldIdLst>
         </p14:section>
-        <p14:section name="Ritorno alla macchina" id="{b7cc8e01-37b8-9b64-23dc-40aea7782046}">
+        <p14:section name="Ritorno alla macchina" id="{2aff54bd-434f-ee7b-e67c-0a4ed1c43a21}">
           <p14:sldIdLst>
             <p14:sldId id="271"/>
             <p14:sldId id="272"/>
@@ -571,6 +571,8 @@
             <a:r>
               <a:rPr lang="en-US" dirty="0"/>
               <a:t>La lezione precedente vi ha dato operatori e proprietà. Questa risponde alla domanda pratica che ne segue: dato ciò che un circuito deve fare, come si trovano le porte? La risposta è un metodo in tre passi, tabella di verità, forma canonica e minimizzazione, e lo applicherete al circuito più importante del corso, l'addizionatore. La lezione si apre con due istruzioni che sommano due bit, e si chiude con i trentadue sommatori che eseguono ogni add che avete scritto.
+Stato di apprendimento: DA COMPRENDERE OGGI, alla fine di questa lezione lo spiegate, lo seguite passo passo e lo applicate da soli; DA UTILIZZARE OGGI, oggi seguite e usate la ricetta; come funziona dentro si spiega più avanti, o non fa parte del corso; DA COMPRENDERE PIÙ AVANTI, riconoscete il nome e lo scopo; lo spiega una lezione successiva. Una slide senza etichetta è contesto: una storia, un esempio, una domanda, un esercizio.
+Stato di apprendimento di questa lezione. DA COMPRENDERE OGGI: il sommatore; le funzioni booleane; le forme canoniche; minimizzazione, Karnaugh. DA UTILIZZARE OGGI: il programma completo, gli strumenti di PRG32 (si usa, non si studia, in questo corso). DA COMPRENDERE PIÙ AVANTI: niente. Una slide senza etichetta è contesto: una storia, un esempio, una domanda, un esercizio.
 Per il docente: Spirale: la lezione si apre con due istruzioni che sommano due bit, mostra che sono un semisommatore, sviluppa poi il metodo (tabella di verità, forma canonica, minimizzazione) che produce circuiti del genere, e si chiude sull'addizionatore a 32 bit che sta dietro l'istruzione add.</a:t>
             </a:r>
             <a:endParaRPr lang="en-US" dirty="0"/>
@@ -660,6 +662,7 @@
             <a:r>
               <a:rPr lang="en-US" dirty="0"/>
               <a:t>La ricetta applicata a F. Per ogni riga in cui F vale 1 si scrive il suo mintermine; l'OR di questi mintermini è la forma canonica P: F è la somma dei mintermini 3, 4, 5, 6 e 7. Per ogni riga in cui F vale 0 si scrive il suo maxtermine; l'AND di questi maxtermini è la forma canonica S: il prodotto dei maxtermini 0, 1 e 2. Entrambe le espressioni sono corrette e uniche. Nessuna è economica: la prima ha cinque clausole e quindici letterali.
+DA COMPRENDERE OGGI: le forme canoniche.
 Per il docente: Ogni funzione ha una e una sola forma canonica per tipo (a meno dell'ordine dei termini). È sintesi a ricetta: sempre possibile, raramente economica.</a:t>
             </a:r>
             <a:endParaRPr lang="en-US" dirty="0"/>
@@ -749,6 +752,7 @@
             <a:r>
               <a:rPr lang="en-US" dirty="0"/>
               <a:t>La forma canonica di F ridotta passo per passo con le leggi della Lezione 08. Si raccoglie A da quattro clausole; si raccoglie di nuovo dentro la parentesi; si applica due volte la legge del complemento; infine si applica la semplificazione x + x'y = x + y. Quindici letterali diventano tre: F = A + BC. Funziona, ma notate ciò che dice la didascalia: a ogni passo bisognava vedere quale legge applicare. Per una funzione più grande non è praticabile. Serve un metodo che non dipenda dall'ispirazione.
+DA COMPRENDERE OGGI: le forme canoniche.
 Per il docente: Da cinque porte AND a tre ingressi e una OR a cinque ingressi, a una AND e una OR. La presentazione originale la chiamava minimizzazione «empirica»: funziona, ma quale legge applicare al passo successivo è lasciato all'intuito. Le mappe di Karnaugh la rendono meccanica.</a:t>
             </a:r>
             <a:endParaRPr lang="en-US" dirty="0"/>
@@ -838,6 +842,7 @@
             <a:r>
               <a:rPr lang="en-US" dirty="0"/>
               <a:t>Una mappa di Karnaugh è la tabella di verità ridisegnata come griglia, con una cella per ogni riga. Il punto essenziale è l'ordine delle celle: due celle vicine differiscono nel valore di una sola variabile, ed è per questo che le colonne sono etichettate 00, 01, 11, 10 e non nell'ordine del conteggio. Grazie a ciò due 1 adiacenti si possono fondere in un'unica clausola con un letterale in meno. La regola: si raggruppano gli 1 in rettangoli di 1, 2, 4 o 8 celle, i più grandi possibile, finché ogni 1 è coperto. Anche i bordi sinistro e destro sono adiacenti.
+DA COMPRENDERE OGGI: minimizzazione, Karnaugh.
 Per il docente: L'ordine 00, 01, 11, 10 è un codice Gray. Maurice Karnaugh, 1953. La presentazione originale suggeriva uno strumento online (edutecnica.it/apps/k/k.htm).</a:t>
             </a:r>
             <a:endParaRPr lang="en-US" dirty="0"/>
@@ -927,6 +932,7 @@
             <a:r>
               <a:rPr lang="en-US" dirty="0"/>
               <a:t>La funzione F della lezione su una mappa di tre variabili. Si scrive 1 nelle celle dei mintermini 3, 4, 5, 6 e 7. Il gruppo rosso prende l'intera riga A = 1, quattro celle: cambiano due variabili, B e C, e la clausola è A. Il gruppo viola prende la colonna BC = 11: A cambia, e la clausola è BC. Ogni 1 è coperto e nessun gruppo si può allargare: F = A + BC. È il risultato della minimizzazione algebrica, trovato a occhio in pochi secondi.
+DA COMPRENDERE OGGI: minimizzazione, Karnaugh.
 Per il docente: Un gruppo di 2^k celle elimina k variabili. Si prendono sempre prima i gruppi più grandi, poi si copre ciò che resta.</a:t>
             </a:r>
             <a:endParaRPr lang="en-US" dirty="0"/>
@@ -1016,6 +1022,7 @@
             <a:r>
               <a:rPr lang="en-US" dirty="0"/>
               <a:t>Con quattro variabili la mappa ha sedici celle, ed entrambe le coppie di etichette seguono l'ordine 00, 01, 11, 10. Il gruppo rosso di quattro al centro dà BD. Anche i quattro angoli formano un solo gruppo, perché la mappa si richiude nelle due direzioni: immaginatela disegnata sulla superficie di una ciambella. Negli angoli B e D valgono entrambe 0, quindi la clausola è B'D'. Il risultato ha quattro letterali invece di trentadue. Guardate sempre bordi e angoli prima di concludere che un 1 è isolato.
+DA COMPRENDERE OGGI: minimizzazione, Karnaugh.
 Per il docente: Slide nuova. Si pensi alla mappa come disegnata su un toro: il bordo superiore tocca quello inferiore e il sinistro tocca il destro.</a:t>
             </a:r>
             <a:endParaRPr lang="en-US" dirty="0"/>
@@ -1105,6 +1112,7 @@
             <a:r>
               <a:rPr lang="en-US" dirty="0"/>
               <a:t>A volte una combinazione di ingressi non può mai presentarsi, oppure quando si presenta l'uscita non importa. Una cifra decimale codificata su quattro bit usa solo dieci delle sedici configurazioni: le altre sei non compaiono mai. Le loro celle si segnano con una x, una condizione di indifferenza, e ogni x si può leggere come 1 o come 0, a seconda di ciò che conviene. Usate una x come 1 quando permette di allargare un gruppo; ignoratela altrimenti. Più libertà significa gruppi più grandi e un circuito più economico.
+DA COMPRENDERE OGGI: minimizzazione, Karnaugh.
 Per il docente: Slide nuova. Tipico esercizio d'esame: il decodificatore per display a sette segmenti, dove ogni segmento è una funzione di quattro variabili con sei indifferenze.</a:t>
             </a:r>
             <a:endParaRPr lang="en-US" dirty="0"/>
@@ -1194,6 +1202,7 @@
             <a:r>
               <a:rPr lang="en-US" dirty="0"/>
               <a:t>Mettete in fila trentadue sommatori completi, uno per posizione di bit. Ognuno riceve un bit di A, un bit di B e il riporto dalla posizione alla sua destra, e passa il proprio riporto a sinistra: un sommatore a propagazione del riporto. È ciò che esegue add t2, t0, t1. Il primo riporto entrante è 0. Per una sottrazione si usa lo stesso addizionatore: il secondo operando è complementato e il primo riporto entrante è 1, cioè il complemento a due della Lezione 05. Il riporto uscente dall'ultima posizione viene semplicemente scartato.
+DA COMPRENDERE OGGI: il sommatore.
 Per il docente: Il riporto uscente dal bit 31 è l'overflow senza segno della Lezione 05, che RISC-V semplicemente scarta. I processori reali usano schemi di riporto più veloci (carry look-ahead), ma la funzione calcolata è la stessa.</a:t>
             </a:r>
             <a:endParaRPr lang="en-US" dirty="0"/>
@@ -1641,6 +1650,7 @@
             <a:r>
               <a:rPr lang="en-US" dirty="0"/>
               <a:t>Cinque conclusioni. Una funzione booleana è una tabella di verità, e una tabella di verità dà sempre un'espressione canonica. La minimizzazione ottimizza la rete per renderla più economica. Le mappe di Karnaugh trasformano l'algebra in una figura: si raggruppano gli 1 e si leggono le clausole. Il semisommatore e il sommatore completo sono i primi veri circuiti del corso. E trentadue sommatori completi in fila eseguono la add che avete scritto nella prima lezione. A seguire: di che cosa sono fatte le porte.
+Stato di apprendimento, riepilogo. DA COMPRENDERE OGGI: il sommatore; le funzioni booleane; le forme canoniche; minimizzazione, Karnaugh. DA UTILIZZARE OGGI: il programma completo, gli strumenti di PRG32 (si usa, non si studia, in questo corso). DA COMPRENDERE PIÙ AVANTI: niente. Una slide senza etichetta è contesto: una storia, un esempio, una domanda, un esercizio.
 Per il docente: Prossima lezione: l'elettronica, per vedere di che cosa sono fatte queste porte; poi le macchine combinatorie e sequenziali.</a:t>
             </a:r>
             <a:endParaRPr lang="en-US" dirty="0"/>
@@ -1730,6 +1740,7 @@
             <a:r>
               <a:rPr lang="en-US" dirty="0"/>
               <a:t>Tre parole. Un letterale è una variabile o il suo complemento così come compare in un'espressione: a, b', x. Una clausola, o termine prodotto, è un prodotto logico di letterali: a b' x. Un fattore, o termine somma, è una somma logica di letterali: (a + x'). Il numero di letterali misura il costo di un'espressione, perché ogni occorrenza di una variabile è l'ingresso di una porta. Conterete i letterali per confrontare due forme della stessa funzione.
+DA COMPRENDERE OGGI: le funzioni booleane.
 Per il docente: In inglese: literal; clause o product term; factor o sum term. Ogni occorrenza di una variabile conta come un letterale: il numero di letterali misura il costo di un'espressione.</a:t>
             </a:r>
             <a:endParaRPr lang="en-US" dirty="0"/>
@@ -1819,6 +1830,7 @@
             <a:r>
               <a:rPr lang="en-US" dirty="0"/>
               <a:t>Una funzione booleana assegna uno 0 o un 1 a ogni combinazione dei suoi n ingressi. Le combinazioni sono 2 alla n, e per ciascuna ci sono due uscite possibili: le funzioni sono quindi 2 elevato a 2 alla n. Con una variabile sono 4, con due 16, con tre 256, con quattro 65.536. Il numero è finito ma cresce con estrema rapidità. L'ultima riga è la ragione per cui si studia tutto questo: ogni circuito digitale si può scrivere come espressione, e ogni espressione si può realizzare come circuito.
+DA COMPRENDERE OGGI: le funzioni booleane.
 Per il docente: f: B^n -&gt; B con B = {0, 1}. Per n = 5 le funzioni sono già più di quattro miliardi: 2^32.</a:t>
             </a:r>
             <a:endParaRPr lang="en-US" dirty="0"/>
@@ -1908,6 +1920,7 @@
             <a:r>
               <a:rPr lang="en-US" dirty="0"/>
               <a:t>Tutte e sedici le funzioni di due variabili. Ogni riga è una funzione, e le quattro colonne centrali sono le sue uscite per gli ingressi 00, 01, 10 e 11; il numero della funzione è quella colonna di uscite letta come numero binario. Tra esse riconoscete, evidenziate, le porte della Lezione 08: AND è f1, XOR è f6, OR è f7, NOR è f8, XNOR è f9, NAND è f14. Le altre sono le due costanti, i due ingressi lasciati passare invariati, le loro negazioni, e quattro funzioni meno comuni.
+DA COMPRENDERE OGGI: le funzioni booleane.
 Per il docente: f0 e f15: costanti. f3, f5: identità (buffer). f12, f10: NOT. f1 AND, f7 OR, f6 XOR, f9 equivalenza, f14 NAND, f8 NOR. f13 è l'implicazione x -&gt; y, f11 è y -&gt; x; f2 e f4 sono le inibizioni.</a:t>
             </a:r>
             <a:endParaRPr lang="en-US" dirty="0"/>
@@ -1997,6 +2010,7 @@
             <a:r>
               <a:rPr lang="en-US" dirty="0"/>
               <a:t>Un insieme di operatori è funzionalmente completo se con esso si può costruire ogni funzione booleana. AND, OR e NOT sono completi. Per le leggi di De Morgan uno tra AND e OR si ottiene dall'altro con NOT, quindi bastano due operatori. Il fatto sorprendente è l'ultimo: NAND da solo è completo, e così NOR da solo. Un solo tipo di porta basta a costruire qualunque circuito digitale, un intero processore compreso; per questo NAND e NOR si chiamano porte universali.
+DA COMPRENDERE OGGI: le funzioni booleane.
 Per il docente: NOT x = x NAND x; x AND y = (x NAND y) NAND (x NAND y); x OR y = (x NAND x) NAND (y NAND y). I chip reali sono fatti in gran parte di NAND e NOR perché richiedono meno transistor.</a:t>
             </a:r>
             <a:endParaRPr lang="en-US" dirty="0"/>
@@ -2086,6 +2100,7 @@
             <a:r>
               <a:rPr lang="en-US" dirty="0"/>
               <a:t>Il semisommatore somma due bit A e B e produce un bit di somma S e un riporto C. Dalla tabella, S vale 1 quando gli ingressi sono diversi, cioè lo XOR, e C vale 1 quando entrambi valgono 1, cioè l'AND. Il circuito a destra è esattamente la coppia di istruzioni del riscaldamento. Si chiama «semi» perché non ha un ingresso per il riporto proveniente da una posizione precedente, quindi da solo può sommare soltanto i bit meno significativi di due numeri.
+DA COMPRENDERE OGGI: il sommatore.
 Per il docente: Il circuito è esattamente la coppia di istruzioni del riscaldamento. «Semi» perché non ha un riporto in ingresso: può sommare solo i bit meno significativi.</a:t>
             </a:r>
             <a:endParaRPr lang="en-US" dirty="0"/>
@@ -2175,6 +2190,7 @@
             <a:r>
               <a:rPr lang="en-US" dirty="0"/>
               <a:t>Il sommatore completo ha tre ingressi: i due bit A e B e un riporto entrante. Produce un bit di somma e un riporto uscente. Leggete la tabella: S vale 1 quando è a 1 un numero dispari di ingressi; il riporto uscente vale 1 quando almeno due ingressi sono a 1. Il circuito è fatto di due semisommatori e un OR: il primo somma A e B, il secondo somma il riporto entrante alla loro somma, e l'OR combina i due possibili riporti. Nel disegno i fili che si incrociano senza un punto non sono collegati.
+DA COMPRENDERE OGGI: il sommatore.
 Per il docente: Due semisommatori e un OR. S vale 1 quando è a 1 un numero dispari di ingressi; Cout vale 1 quando almeno due ingressi sono a 1. I fili che si incrociano senza un punto non sono collegati.</a:t>
             </a:r>
             <a:endParaRPr lang="en-US" dirty="0"/>
@@ -2264,6 +2280,7 @@
             <a:r>
               <a:rPr lang="en-US" dirty="0"/>
               <a:t>Un mintermine è un prodotto che contiene ogni variabile una volta, complementata o no. La sua proprietà speciale è di valere 1 per una e una sola riga della tabella di verità: a'b'c vale 1 solo quando a è 0, b è 0 e c è 1. Un maxtermine è una somma che contiene ogni variabile una volta, e vale 0 per una e una sola riga. Per scrivere il mintermine di una riga si complementano le variabili che in quella riga valgono 0; per il maxtermine, quelle che valgono 1.
+DA COMPRENDERE OGGI: le forme canoniche.
 Per il docente: In inglese: minterm (termine prodotto P); maxterm (fattore somma S). Il mintermine i corrisponde alla riga i: una variabile compare complementata dove la riga ha uno 0.</a:t>
             </a:r>
             <a:endParaRPr lang="en-US" dirty="0"/>
@@ -3401,6 +3418,420 @@
       </p:pic>
       <p:sp>
         <p:nvSpPr>
+          <p:cNvPr id="15" name="Shape 12"/>
+          <p:cNvSpPr/>
+          <p:nvPr/>
+        </p:nvSpPr>
+        <p:spPr>
+          <a:xfrm>
+            <a:off x="8910777" y="91440"/>
+            <a:ext cx="2732278" cy="274320"/>
+          </a:xfrm>
+          <a:prstGeom prst="rect">
+            <a:avLst/>
+          </a:prstGeom>
+          <a:solidFill>
+            <a:srgbClr val="F3E8FF"/>
+          </a:solidFill>
+          <a:ln w="12700">
+            <a:solidFill>
+              <a:srgbClr val="7E22CE"/>
+            </a:solidFill>
+            <a:prstDash val="dash"/>
+          </a:ln>
+        </p:spPr>
+      </p:sp>
+      <p:sp>
+        <p:nvSpPr>
+          <p:cNvPr id="16" name="Shape 13"/>
+          <p:cNvSpPr/>
+          <p:nvPr/>
+        </p:nvSpPr>
+        <p:spPr>
+          <a:xfrm>
+            <a:off x="8938209" y="128016"/>
+            <a:ext cx="45720" cy="45720"/>
+          </a:xfrm>
+          <a:prstGeom prst="rect">
+            <a:avLst/>
+          </a:prstGeom>
+          <a:solidFill>
+            <a:srgbClr val="7E22CE"/>
+          </a:solidFill>
+          <a:ln w="12700">
+            <a:solidFill>
+              <a:srgbClr val="7E22CE"/>
+            </a:solidFill>
+            <a:prstDash val="solid"/>
+          </a:ln>
+        </p:spPr>
+      </p:sp>
+      <p:sp>
+        <p:nvSpPr>
+          <p:cNvPr id="17" name="Shape 14"/>
+          <p:cNvSpPr/>
+          <p:nvPr/>
+        </p:nvSpPr>
+        <p:spPr>
+          <a:xfrm>
+            <a:off x="8938209" y="205740"/>
+            <a:ext cx="45720" cy="45720"/>
+          </a:xfrm>
+          <a:prstGeom prst="rect">
+            <a:avLst/>
+          </a:prstGeom>
+          <a:solidFill>
+            <a:srgbClr val="7E22CE"/>
+          </a:solidFill>
+          <a:ln w="12700">
+            <a:solidFill>
+              <a:srgbClr val="7E22CE"/>
+            </a:solidFill>
+            <a:prstDash val="solid"/>
+          </a:ln>
+        </p:spPr>
+      </p:sp>
+      <p:sp>
+        <p:nvSpPr>
+          <p:cNvPr id="18" name="Shape 15"/>
+          <p:cNvSpPr/>
+          <p:nvPr/>
+        </p:nvSpPr>
+        <p:spPr>
+          <a:xfrm>
+            <a:off x="8938209" y="283464"/>
+            <a:ext cx="45720" cy="45720"/>
+          </a:xfrm>
+          <a:prstGeom prst="rect">
+            <a:avLst/>
+          </a:prstGeom>
+          <a:solidFill>
+            <a:srgbClr val="7E22CE"/>
+          </a:solidFill>
+          <a:ln w="12700">
+            <a:solidFill>
+              <a:srgbClr val="7E22CE"/>
+            </a:solidFill>
+            <a:prstDash val="solid"/>
+          </a:ln>
+        </p:spPr>
+      </p:sp>
+      <p:pic>
+        <p:nvPicPr>
+          <p:cNvPr id="19" name="Image 1" descr="preencoded.png">    </p:cNvPr>
+          <p:cNvPicPr>
+            <a:picLocks noChangeAspect="1"/>
+          </p:cNvPicPr>
+          <p:nvPr/>
+        </p:nvPicPr>
+        <p:blipFill>
+          <a:blip r:embed="rId2"/>
+          <a:stretch>
+            <a:fillRect/>
+          </a:stretch>
+        </p:blipFill>
+        <p:spPr>
+          <a:xfrm>
+            <a:off x="9038793" y="128016"/>
+            <a:ext cx="201168" cy="201168"/>
+          </a:xfrm>
+          <a:prstGeom prst="rect">
+            <a:avLst/>
+          </a:prstGeom>
+        </p:spPr>
+      </p:pic>
+      <p:sp>
+        <p:nvSpPr>
+          <p:cNvPr id="20" name="Text 16"/>
+          <p:cNvSpPr txBox="1"/>
+          <p:nvPr/>
+        </p:nvSpPr>
+        <p:spPr>
+          <a:xfrm>
+            <a:off x="9294825" y="91440"/>
+            <a:ext cx="2311654" cy="274320"/>
+          </a:xfrm>
+          <a:prstGeom prst="rect">
+            <a:avLst/>
+          </a:prstGeom>
+          <a:noFill/>
+          <a:ln/>
+        </p:spPr>
+        <p:txBody>
+          <a:bodyPr wrap="square" lIns="0" tIns="0" rIns="0" bIns="0" rtlCol="0" anchor="ctr"/>
+          <a:lstStyle/>
+          <a:p>
+            <a:pPr indent="0" marL="0">
+              <a:buNone/>
+            </a:pPr>
+            <a:r>
+              <a:rPr lang="en-US" sz="1100" b="1" dirty="0">
+                <a:solidFill>
+                  <a:srgbClr val="6B21A8"/>
+                </a:solidFill>
+                <a:latin typeface="Calibri" pitchFamily="34" charset="0"/>
+                <a:ea typeface="Calibri" pitchFamily="34" charset="-122"/>
+                <a:cs typeface="Calibri" pitchFamily="34" charset="-120"/>
+              </a:rPr>
+              <a:t>DA COMPRENDERE PIÙ AVANTI</a:t>
+            </a:r>
+            <a:endParaRPr lang="en-US" sz="1100" dirty="0"/>
+          </a:p>
+        </p:txBody>
+      </p:sp>
+      <p:sp>
+        <p:nvSpPr>
+          <p:cNvPr id="21" name="Shape 17"/>
+          <p:cNvSpPr/>
+          <p:nvPr/>
+        </p:nvSpPr>
+        <p:spPr>
+          <a:xfrm>
+            <a:off x="6675069" y="91440"/>
+            <a:ext cx="2125980" cy="274320"/>
+          </a:xfrm>
+          <a:prstGeom prst="rect">
+            <a:avLst/>
+          </a:prstGeom>
+          <a:solidFill>
+            <a:srgbClr val="FEF3C7"/>
+          </a:solidFill>
+          <a:ln w="12700">
+            <a:solidFill>
+              <a:srgbClr val="B45309"/>
+            </a:solidFill>
+            <a:prstDash val="solid"/>
+          </a:ln>
+        </p:spPr>
+      </p:sp>
+      <p:sp>
+        <p:nvSpPr>
+          <p:cNvPr id="22" name="Shape 18"/>
+          <p:cNvSpPr/>
+          <p:nvPr/>
+        </p:nvSpPr>
+        <p:spPr>
+          <a:xfrm>
+            <a:off x="6675069" y="91440"/>
+            <a:ext cx="27432" cy="274320"/>
+          </a:xfrm>
+          <a:prstGeom prst="rect">
+            <a:avLst/>
+          </a:prstGeom>
+          <a:solidFill>
+            <a:srgbClr val="B45309"/>
+          </a:solidFill>
+          <a:ln w="12700">
+            <a:solidFill>
+              <a:srgbClr val="B45309"/>
+            </a:solidFill>
+            <a:prstDash val="solid"/>
+          </a:ln>
+        </p:spPr>
+      </p:sp>
+      <p:sp>
+        <p:nvSpPr>
+          <p:cNvPr id="23" name="Shape 19"/>
+          <p:cNvSpPr/>
+          <p:nvPr/>
+        </p:nvSpPr>
+        <p:spPr>
+          <a:xfrm>
+            <a:off x="6729933" y="91440"/>
+            <a:ext cx="27432" cy="274320"/>
+          </a:xfrm>
+          <a:prstGeom prst="rect">
+            <a:avLst/>
+          </a:prstGeom>
+          <a:solidFill>
+            <a:srgbClr val="B45309"/>
+          </a:solidFill>
+          <a:ln w="12700">
+            <a:solidFill>
+              <a:srgbClr val="B45309"/>
+            </a:solidFill>
+            <a:prstDash val="solid"/>
+          </a:ln>
+        </p:spPr>
+      </p:sp>
+      <p:pic>
+        <p:nvPicPr>
+          <p:cNvPr id="24" name="Image 2" descr="preencoded.png">    </p:cNvPr>
+          <p:cNvPicPr>
+            <a:picLocks noChangeAspect="1"/>
+          </p:cNvPicPr>
+          <p:nvPr/>
+        </p:nvPicPr>
+        <p:blipFill>
+          <a:blip r:embed="rId3"/>
+          <a:stretch>
+            <a:fillRect/>
+          </a:stretch>
+        </p:blipFill>
+        <p:spPr>
+          <a:xfrm>
+            <a:off x="6803085" y="128016"/>
+            <a:ext cx="201168" cy="201168"/>
+          </a:xfrm>
+          <a:prstGeom prst="rect">
+            <a:avLst/>
+          </a:prstGeom>
+        </p:spPr>
+      </p:pic>
+      <p:sp>
+        <p:nvSpPr>
+          <p:cNvPr id="25" name="Text 20"/>
+          <p:cNvSpPr txBox="1"/>
+          <p:nvPr/>
+        </p:nvSpPr>
+        <p:spPr>
+          <a:xfrm>
+            <a:off x="7059117" y="91440"/>
+            <a:ext cx="1705356" cy="274320"/>
+          </a:xfrm>
+          <a:prstGeom prst="rect">
+            <a:avLst/>
+          </a:prstGeom>
+          <a:noFill/>
+          <a:ln/>
+        </p:spPr>
+        <p:txBody>
+          <a:bodyPr wrap="square" lIns="0" tIns="0" rIns="0" bIns="0" rtlCol="0" anchor="ctr"/>
+          <a:lstStyle/>
+          <a:p>
+            <a:pPr indent="0" marL="0">
+              <a:buNone/>
+            </a:pPr>
+            <a:r>
+              <a:rPr lang="en-US" sz="1100" b="1" dirty="0">
+                <a:solidFill>
+                  <a:srgbClr val="92400E"/>
+                </a:solidFill>
+                <a:latin typeface="Calibri" pitchFamily="34" charset="0"/>
+                <a:ea typeface="Calibri" pitchFamily="34" charset="-122"/>
+                <a:cs typeface="Calibri" pitchFamily="34" charset="-120"/>
+              </a:rPr>
+              <a:t>DA UTILIZZARE OGGI</a:t>
+            </a:r>
+            <a:endParaRPr lang="en-US" sz="1100" dirty="0"/>
+          </a:p>
+        </p:txBody>
+      </p:sp>
+      <p:sp>
+        <p:nvSpPr>
+          <p:cNvPr id="26" name="Shape 21"/>
+          <p:cNvSpPr/>
+          <p:nvPr/>
+        </p:nvSpPr>
+        <p:spPr>
+          <a:xfrm>
+            <a:off x="4352747" y="91440"/>
+            <a:ext cx="2212594" cy="274320"/>
+          </a:xfrm>
+          <a:prstGeom prst="rect">
+            <a:avLst/>
+          </a:prstGeom>
+          <a:solidFill>
+            <a:srgbClr val="E0F2FE"/>
+          </a:solidFill>
+          <a:ln w="12700">
+            <a:solidFill>
+              <a:srgbClr val="0369A1"/>
+            </a:solidFill>
+            <a:prstDash val="solid"/>
+          </a:ln>
+        </p:spPr>
+      </p:sp>
+      <p:sp>
+        <p:nvSpPr>
+          <p:cNvPr id="27" name="Shape 22"/>
+          <p:cNvSpPr/>
+          <p:nvPr/>
+        </p:nvSpPr>
+        <p:spPr>
+          <a:xfrm>
+            <a:off x="4352747" y="91440"/>
+            <a:ext cx="73152" cy="274320"/>
+          </a:xfrm>
+          <a:prstGeom prst="rect">
+            <a:avLst/>
+          </a:prstGeom>
+          <a:solidFill>
+            <a:srgbClr val="0369A1"/>
+          </a:solidFill>
+          <a:ln w="12700">
+            <a:solidFill>
+              <a:srgbClr val="0369A1"/>
+            </a:solidFill>
+            <a:prstDash val="solid"/>
+          </a:ln>
+        </p:spPr>
+      </p:sp>
+      <p:pic>
+        <p:nvPicPr>
+          <p:cNvPr id="28" name="Image 3" descr="preencoded.png">    </p:cNvPr>
+          <p:cNvPicPr>
+            <a:picLocks noChangeAspect="1"/>
+          </p:cNvPicPr>
+          <p:nvPr/>
+        </p:nvPicPr>
+        <p:blipFill>
+          <a:blip r:embed="rId4"/>
+          <a:stretch>
+            <a:fillRect/>
+          </a:stretch>
+        </p:blipFill>
+        <p:spPr>
+          <a:xfrm>
+            <a:off x="4480763" y="128016"/>
+            <a:ext cx="201168" cy="201168"/>
+          </a:xfrm>
+          <a:prstGeom prst="rect">
+            <a:avLst/>
+          </a:prstGeom>
+        </p:spPr>
+      </p:pic>
+      <p:sp>
+        <p:nvSpPr>
+          <p:cNvPr id="29" name="Text 23"/>
+          <p:cNvSpPr txBox="1"/>
+          <p:nvPr/>
+        </p:nvSpPr>
+        <p:spPr>
+          <a:xfrm>
+            <a:off x="4736795" y="91440"/>
+            <a:ext cx="1791970" cy="274320"/>
+          </a:xfrm>
+          <a:prstGeom prst="rect">
+            <a:avLst/>
+          </a:prstGeom>
+          <a:noFill/>
+          <a:ln/>
+        </p:spPr>
+        <p:txBody>
+          <a:bodyPr wrap="square" lIns="0" tIns="0" rIns="0" bIns="0" rtlCol="0" anchor="ctr"/>
+          <a:lstStyle/>
+          <a:p>
+            <a:pPr indent="0" marL="0">
+              <a:buNone/>
+            </a:pPr>
+            <a:r>
+              <a:rPr lang="en-US" sz="1100" b="1" dirty="0">
+                <a:solidFill>
+                  <a:srgbClr val="075985"/>
+                </a:solidFill>
+                <a:latin typeface="Calibri" pitchFamily="34" charset="0"/>
+                <a:ea typeface="Calibri" pitchFamily="34" charset="-122"/>
+                <a:cs typeface="Calibri" pitchFamily="34" charset="-120"/>
+              </a:rPr>
+              <a:t>DA COMPRENDERE OGGI</a:t>
+            </a:r>
+            <a:endParaRPr lang="en-US" sz="1100" dirty="0"/>
+          </a:p>
+        </p:txBody>
+      </p:sp>
+      <p:sp>
+        <p:nvSpPr>
           <p:cNvPr id="25" name="Slide Number Placeholder 0"/>
           <p:cNvSpPr>
             <a:spLocks noGrp="1"/>
@@ -7439,6 +7870,133 @@
       </p:sp>
       <p:sp>
         <p:nvSpPr>
+          <p:cNvPr id="12" name="Shape 9"/>
+          <p:cNvSpPr/>
+          <p:nvPr/>
+        </p:nvSpPr>
+        <p:spPr>
+          <a:xfrm>
+            <a:off x="8051622" y="91440"/>
+            <a:ext cx="3591433" cy="274320"/>
+          </a:xfrm>
+          <a:prstGeom prst="rect">
+            <a:avLst/>
+          </a:prstGeom>
+          <a:solidFill>
+            <a:srgbClr val="E0F2FE"/>
+          </a:solidFill>
+          <a:ln w="12700">
+            <a:solidFill>
+              <a:srgbClr val="0369A1"/>
+            </a:solidFill>
+            <a:prstDash val="solid"/>
+          </a:ln>
+        </p:spPr>
+      </p:sp>
+      <p:sp>
+        <p:nvSpPr>
+          <p:cNvPr id="13" name="Shape 10"/>
+          <p:cNvSpPr/>
+          <p:nvPr/>
+        </p:nvSpPr>
+        <p:spPr>
+          <a:xfrm>
+            <a:off x="8051622" y="91440"/>
+            <a:ext cx="73152" cy="274320"/>
+          </a:xfrm>
+          <a:prstGeom prst="rect">
+            <a:avLst/>
+          </a:prstGeom>
+          <a:solidFill>
+            <a:srgbClr val="0369A1"/>
+          </a:solidFill>
+          <a:ln w="12700">
+            <a:solidFill>
+              <a:srgbClr val="0369A1"/>
+            </a:solidFill>
+            <a:prstDash val="solid"/>
+          </a:ln>
+        </p:spPr>
+      </p:sp>
+      <p:pic>
+        <p:nvPicPr>
+          <p:cNvPr id="14" name="Image 0" descr="preencoded.png">    </p:cNvPr>
+          <p:cNvPicPr>
+            <a:picLocks noChangeAspect="1"/>
+          </p:cNvPicPr>
+          <p:nvPr/>
+        </p:nvPicPr>
+        <p:blipFill>
+          <a:blip r:embed="rId1"/>
+          <a:stretch>
+            <a:fillRect/>
+          </a:stretch>
+        </p:blipFill>
+        <p:spPr>
+          <a:xfrm>
+            <a:off x="8179638" y="128016"/>
+            <a:ext cx="201168" cy="201168"/>
+          </a:xfrm>
+          <a:prstGeom prst="rect">
+            <a:avLst/>
+          </a:prstGeom>
+        </p:spPr>
+      </p:pic>
+      <p:sp>
+        <p:nvSpPr>
+          <p:cNvPr id="15" name="Text 11"/>
+          <p:cNvSpPr txBox="1"/>
+          <p:nvPr/>
+        </p:nvSpPr>
+        <p:spPr>
+          <a:xfrm>
+            <a:off x="8435670" y="91440"/>
+            <a:ext cx="3170809" cy="274320"/>
+          </a:xfrm>
+          <a:prstGeom prst="rect">
+            <a:avLst/>
+          </a:prstGeom>
+          <a:noFill/>
+          <a:ln/>
+        </p:spPr>
+        <p:txBody>
+          <a:bodyPr wrap="square" lIns="0" tIns="0" rIns="0" bIns="0" rtlCol="0" anchor="ctr"/>
+          <a:lstStyle/>
+          <a:p>
+            <a:pPr indent="0" marL="0">
+              <a:buNone/>
+            </a:pPr>
+            <a:r>
+              <a:rPr lang="en-US" sz="1100" b="1" dirty="0">
+                <a:solidFill>
+                  <a:srgbClr val="075985"/>
+                </a:solidFill>
+                <a:latin typeface="Calibri" pitchFamily="34" charset="0"/>
+                <a:ea typeface="Calibri" pitchFamily="34" charset="-122"/>
+                <a:cs typeface="Calibri" pitchFamily="34" charset="-120"/>
+              </a:rPr>
+              <a:t>DA COMPRENDERE OGGI</a:t>
+            </a:r>
+            <a:pPr indent="0" marL="0">
+              <a:buNone/>
+            </a:pPr>
+            <a:r>
+              <a:rPr lang="en-US" sz="1100" dirty="0">
+                <a:solidFill>
+                  <a:srgbClr val="075985"/>
+                </a:solidFill>
+                <a:latin typeface="Calibri" pitchFamily="34" charset="0"/>
+                <a:ea typeface="Calibri" pitchFamily="34" charset="-122"/>
+                <a:cs typeface="Calibri" pitchFamily="34" charset="-120"/>
+              </a:rPr>
+              <a:t> · le forme canoniche</a:t>
+            </a:r>
+            <a:endParaRPr lang="en-US" sz="1100" dirty="0"/>
+          </a:p>
+        </p:txBody>
+      </p:sp>
+      <p:sp>
+        <p:nvSpPr>
           <p:cNvPr id="25" name="Slide Number Placeholder 0"/>
           <p:cNvSpPr>
             <a:spLocks noGrp="1"/>
@@ -8588,6 +9146,133 @@
       </p:sp>
       <p:sp>
         <p:nvSpPr>
+          <p:cNvPr id="5" name="Shape 2"/>
+          <p:cNvSpPr/>
+          <p:nvPr/>
+        </p:nvSpPr>
+        <p:spPr>
+          <a:xfrm>
+            <a:off x="8051622" y="91440"/>
+            <a:ext cx="3591433" cy="274320"/>
+          </a:xfrm>
+          <a:prstGeom prst="rect">
+            <a:avLst/>
+          </a:prstGeom>
+          <a:solidFill>
+            <a:srgbClr val="E0F2FE"/>
+          </a:solidFill>
+          <a:ln w="12700">
+            <a:solidFill>
+              <a:srgbClr val="0369A1"/>
+            </a:solidFill>
+            <a:prstDash val="solid"/>
+          </a:ln>
+        </p:spPr>
+      </p:sp>
+      <p:sp>
+        <p:nvSpPr>
+          <p:cNvPr id="6" name="Shape 3"/>
+          <p:cNvSpPr/>
+          <p:nvPr/>
+        </p:nvSpPr>
+        <p:spPr>
+          <a:xfrm>
+            <a:off x="8051622" y="91440"/>
+            <a:ext cx="73152" cy="274320"/>
+          </a:xfrm>
+          <a:prstGeom prst="rect">
+            <a:avLst/>
+          </a:prstGeom>
+          <a:solidFill>
+            <a:srgbClr val="0369A1"/>
+          </a:solidFill>
+          <a:ln w="12700">
+            <a:solidFill>
+              <a:srgbClr val="0369A1"/>
+            </a:solidFill>
+            <a:prstDash val="solid"/>
+          </a:ln>
+        </p:spPr>
+      </p:sp>
+      <p:pic>
+        <p:nvPicPr>
+          <p:cNvPr id="7" name="Image 0" descr="preencoded.png">    </p:cNvPr>
+          <p:cNvPicPr>
+            <a:picLocks noChangeAspect="1"/>
+          </p:cNvPicPr>
+          <p:nvPr/>
+        </p:nvPicPr>
+        <p:blipFill>
+          <a:blip r:embed="rId1"/>
+          <a:stretch>
+            <a:fillRect/>
+          </a:stretch>
+        </p:blipFill>
+        <p:spPr>
+          <a:xfrm>
+            <a:off x="8179638" y="128016"/>
+            <a:ext cx="201168" cy="201168"/>
+          </a:xfrm>
+          <a:prstGeom prst="rect">
+            <a:avLst/>
+          </a:prstGeom>
+        </p:spPr>
+      </p:pic>
+      <p:sp>
+        <p:nvSpPr>
+          <p:cNvPr id="8" name="Text 4"/>
+          <p:cNvSpPr txBox="1"/>
+          <p:nvPr/>
+        </p:nvSpPr>
+        <p:spPr>
+          <a:xfrm>
+            <a:off x="8435670" y="91440"/>
+            <a:ext cx="3170809" cy="274320"/>
+          </a:xfrm>
+          <a:prstGeom prst="rect">
+            <a:avLst/>
+          </a:prstGeom>
+          <a:noFill/>
+          <a:ln/>
+        </p:spPr>
+        <p:txBody>
+          <a:bodyPr wrap="square" lIns="0" tIns="0" rIns="0" bIns="0" rtlCol="0" anchor="ctr"/>
+          <a:lstStyle/>
+          <a:p>
+            <a:pPr indent="0" marL="0">
+              <a:buNone/>
+            </a:pPr>
+            <a:r>
+              <a:rPr lang="en-US" sz="1100" b="1" dirty="0">
+                <a:solidFill>
+                  <a:srgbClr val="075985"/>
+                </a:solidFill>
+                <a:latin typeface="Calibri" pitchFamily="34" charset="0"/>
+                <a:ea typeface="Calibri" pitchFamily="34" charset="-122"/>
+                <a:cs typeface="Calibri" pitchFamily="34" charset="-120"/>
+              </a:rPr>
+              <a:t>DA COMPRENDERE OGGI</a:t>
+            </a:r>
+            <a:pPr indent="0" marL="0">
+              <a:buNone/>
+            </a:pPr>
+            <a:r>
+              <a:rPr lang="en-US" sz="1100" dirty="0">
+                <a:solidFill>
+                  <a:srgbClr val="075985"/>
+                </a:solidFill>
+                <a:latin typeface="Calibri" pitchFamily="34" charset="0"/>
+                <a:ea typeface="Calibri" pitchFamily="34" charset="-122"/>
+                <a:cs typeface="Calibri" pitchFamily="34" charset="-120"/>
+              </a:rPr>
+              <a:t> · le forme canoniche</a:t>
+            </a:r>
+            <a:endParaRPr lang="en-US" sz="1100" dirty="0"/>
+          </a:p>
+        </p:txBody>
+      </p:sp>
+      <p:sp>
+        <p:nvSpPr>
           <p:cNvPr id="25" name="Slide Number Placeholder 0"/>
           <p:cNvSpPr>
             <a:spLocks noGrp="1"/>
@@ -9795,6 +10480,133 @@
       </p:sp>
       <p:sp>
         <p:nvSpPr>
+          <p:cNvPr id="31" name="Shape 29"/>
+          <p:cNvSpPr/>
+          <p:nvPr/>
+        </p:nvSpPr>
+        <p:spPr>
+          <a:xfrm>
+            <a:off x="7657668" y="91440"/>
+            <a:ext cx="3985387" cy="274320"/>
+          </a:xfrm>
+          <a:prstGeom prst="rect">
+            <a:avLst/>
+          </a:prstGeom>
+          <a:solidFill>
+            <a:srgbClr val="E0F2FE"/>
+          </a:solidFill>
+          <a:ln w="12700">
+            <a:solidFill>
+              <a:srgbClr val="0369A1"/>
+            </a:solidFill>
+            <a:prstDash val="solid"/>
+          </a:ln>
+        </p:spPr>
+      </p:sp>
+      <p:sp>
+        <p:nvSpPr>
+          <p:cNvPr id="32" name="Shape 30"/>
+          <p:cNvSpPr/>
+          <p:nvPr/>
+        </p:nvSpPr>
+        <p:spPr>
+          <a:xfrm>
+            <a:off x="7657668" y="91440"/>
+            <a:ext cx="73152" cy="274320"/>
+          </a:xfrm>
+          <a:prstGeom prst="rect">
+            <a:avLst/>
+          </a:prstGeom>
+          <a:solidFill>
+            <a:srgbClr val="0369A1"/>
+          </a:solidFill>
+          <a:ln w="12700">
+            <a:solidFill>
+              <a:srgbClr val="0369A1"/>
+            </a:solidFill>
+            <a:prstDash val="solid"/>
+          </a:ln>
+        </p:spPr>
+      </p:sp>
+      <p:pic>
+        <p:nvPicPr>
+          <p:cNvPr id="33" name="Image 0" descr="preencoded.png">    </p:cNvPr>
+          <p:cNvPicPr>
+            <a:picLocks noChangeAspect="1"/>
+          </p:cNvPicPr>
+          <p:nvPr/>
+        </p:nvPicPr>
+        <p:blipFill>
+          <a:blip r:embed="rId1"/>
+          <a:stretch>
+            <a:fillRect/>
+          </a:stretch>
+        </p:blipFill>
+        <p:spPr>
+          <a:xfrm>
+            <a:off x="7785684" y="128016"/>
+            <a:ext cx="201168" cy="201168"/>
+          </a:xfrm>
+          <a:prstGeom prst="rect">
+            <a:avLst/>
+          </a:prstGeom>
+        </p:spPr>
+      </p:pic>
+      <p:sp>
+        <p:nvSpPr>
+          <p:cNvPr id="34" name="Text 31"/>
+          <p:cNvSpPr txBox="1"/>
+          <p:nvPr/>
+        </p:nvSpPr>
+        <p:spPr>
+          <a:xfrm>
+            <a:off x="8041716" y="91440"/>
+            <a:ext cx="3564763" cy="274320"/>
+          </a:xfrm>
+          <a:prstGeom prst="rect">
+            <a:avLst/>
+          </a:prstGeom>
+          <a:noFill/>
+          <a:ln/>
+        </p:spPr>
+        <p:txBody>
+          <a:bodyPr wrap="square" lIns="0" tIns="0" rIns="0" bIns="0" rtlCol="0" anchor="ctr"/>
+          <a:lstStyle/>
+          <a:p>
+            <a:pPr indent="0" marL="0">
+              <a:buNone/>
+            </a:pPr>
+            <a:r>
+              <a:rPr lang="en-US" sz="1100" b="1" dirty="0">
+                <a:solidFill>
+                  <a:srgbClr val="075985"/>
+                </a:solidFill>
+                <a:latin typeface="Calibri" pitchFamily="34" charset="0"/>
+                <a:ea typeface="Calibri" pitchFamily="34" charset="-122"/>
+                <a:cs typeface="Calibri" pitchFamily="34" charset="-120"/>
+              </a:rPr>
+              <a:t>DA COMPRENDERE OGGI</a:t>
+            </a:r>
+            <a:pPr indent="0" marL="0">
+              <a:buNone/>
+            </a:pPr>
+            <a:r>
+              <a:rPr lang="en-US" sz="1100" dirty="0">
+                <a:solidFill>
+                  <a:srgbClr val="075985"/>
+                </a:solidFill>
+                <a:latin typeface="Calibri" pitchFamily="34" charset="0"/>
+                <a:ea typeface="Calibri" pitchFamily="34" charset="-122"/>
+                <a:cs typeface="Calibri" pitchFamily="34" charset="-120"/>
+              </a:rPr>
+              <a:t> · minimizzazione, Karnaugh</a:t>
+            </a:r>
+            <a:endParaRPr lang="en-US" sz="1100" dirty="0"/>
+          </a:p>
+        </p:txBody>
+      </p:sp>
+      <p:sp>
+        <p:nvSpPr>
           <p:cNvPr id="25" name="Slide Number Placeholder 0"/>
           <p:cNvSpPr>
             <a:spLocks noGrp="1"/>
@@ -11080,6 +11892,133 @@
       </p:sp>
       <p:sp>
         <p:nvSpPr>
+          <p:cNvPr id="33" name="Shape 31"/>
+          <p:cNvSpPr/>
+          <p:nvPr/>
+        </p:nvSpPr>
+        <p:spPr>
+          <a:xfrm>
+            <a:off x="7657668" y="91440"/>
+            <a:ext cx="3985387" cy="274320"/>
+          </a:xfrm>
+          <a:prstGeom prst="rect">
+            <a:avLst/>
+          </a:prstGeom>
+          <a:solidFill>
+            <a:srgbClr val="E0F2FE"/>
+          </a:solidFill>
+          <a:ln w="12700">
+            <a:solidFill>
+              <a:srgbClr val="0369A1"/>
+            </a:solidFill>
+            <a:prstDash val="solid"/>
+          </a:ln>
+        </p:spPr>
+      </p:sp>
+      <p:sp>
+        <p:nvSpPr>
+          <p:cNvPr id="34" name="Shape 32"/>
+          <p:cNvSpPr/>
+          <p:nvPr/>
+        </p:nvSpPr>
+        <p:spPr>
+          <a:xfrm>
+            <a:off x="7657668" y="91440"/>
+            <a:ext cx="73152" cy="274320"/>
+          </a:xfrm>
+          <a:prstGeom prst="rect">
+            <a:avLst/>
+          </a:prstGeom>
+          <a:solidFill>
+            <a:srgbClr val="0369A1"/>
+          </a:solidFill>
+          <a:ln w="12700">
+            <a:solidFill>
+              <a:srgbClr val="0369A1"/>
+            </a:solidFill>
+            <a:prstDash val="solid"/>
+          </a:ln>
+        </p:spPr>
+      </p:sp>
+      <p:pic>
+        <p:nvPicPr>
+          <p:cNvPr id="35" name="Image 0" descr="preencoded.png">    </p:cNvPr>
+          <p:cNvPicPr>
+            <a:picLocks noChangeAspect="1"/>
+          </p:cNvPicPr>
+          <p:nvPr/>
+        </p:nvPicPr>
+        <p:blipFill>
+          <a:blip r:embed="rId1"/>
+          <a:stretch>
+            <a:fillRect/>
+          </a:stretch>
+        </p:blipFill>
+        <p:spPr>
+          <a:xfrm>
+            <a:off x="7785684" y="128016"/>
+            <a:ext cx="201168" cy="201168"/>
+          </a:xfrm>
+          <a:prstGeom prst="rect">
+            <a:avLst/>
+          </a:prstGeom>
+        </p:spPr>
+      </p:pic>
+      <p:sp>
+        <p:nvSpPr>
+          <p:cNvPr id="36" name="Text 33"/>
+          <p:cNvSpPr txBox="1"/>
+          <p:nvPr/>
+        </p:nvSpPr>
+        <p:spPr>
+          <a:xfrm>
+            <a:off x="8041716" y="91440"/>
+            <a:ext cx="3564763" cy="274320"/>
+          </a:xfrm>
+          <a:prstGeom prst="rect">
+            <a:avLst/>
+          </a:prstGeom>
+          <a:noFill/>
+          <a:ln/>
+        </p:spPr>
+        <p:txBody>
+          <a:bodyPr wrap="square" lIns="0" tIns="0" rIns="0" bIns="0" rtlCol="0" anchor="ctr"/>
+          <a:lstStyle/>
+          <a:p>
+            <a:pPr indent="0" marL="0">
+              <a:buNone/>
+            </a:pPr>
+            <a:r>
+              <a:rPr lang="en-US" sz="1100" b="1" dirty="0">
+                <a:solidFill>
+                  <a:srgbClr val="075985"/>
+                </a:solidFill>
+                <a:latin typeface="Calibri" pitchFamily="34" charset="0"/>
+                <a:ea typeface="Calibri" pitchFamily="34" charset="-122"/>
+                <a:cs typeface="Calibri" pitchFamily="34" charset="-120"/>
+              </a:rPr>
+              <a:t>DA COMPRENDERE OGGI</a:t>
+            </a:r>
+            <a:pPr indent="0" marL="0">
+              <a:buNone/>
+            </a:pPr>
+            <a:r>
+              <a:rPr lang="en-US" sz="1100" dirty="0">
+                <a:solidFill>
+                  <a:srgbClr val="075985"/>
+                </a:solidFill>
+                <a:latin typeface="Calibri" pitchFamily="34" charset="0"/>
+                <a:ea typeface="Calibri" pitchFamily="34" charset="-122"/>
+                <a:cs typeface="Calibri" pitchFamily="34" charset="-120"/>
+              </a:rPr>
+              <a:t> · minimizzazione, Karnaugh</a:t>
+            </a:r>
+            <a:endParaRPr lang="en-US" sz="1100" dirty="0"/>
+          </a:p>
+        </p:txBody>
+      </p:sp>
+      <p:sp>
+        <p:nvSpPr>
           <p:cNvPr id="25" name="Slide Number Placeholder 0"/>
           <p:cNvSpPr>
             <a:spLocks noGrp="1"/>
@@ -12823,6 +13762,133 @@
       </p:sp>
       <p:sp>
         <p:nvSpPr>
+          <p:cNvPr id="44" name="Shape 42"/>
+          <p:cNvSpPr/>
+          <p:nvPr/>
+        </p:nvSpPr>
+        <p:spPr>
+          <a:xfrm>
+            <a:off x="7657668" y="91440"/>
+            <a:ext cx="3985387" cy="274320"/>
+          </a:xfrm>
+          <a:prstGeom prst="rect">
+            <a:avLst/>
+          </a:prstGeom>
+          <a:solidFill>
+            <a:srgbClr val="E0F2FE"/>
+          </a:solidFill>
+          <a:ln w="12700">
+            <a:solidFill>
+              <a:srgbClr val="0369A1"/>
+            </a:solidFill>
+            <a:prstDash val="solid"/>
+          </a:ln>
+        </p:spPr>
+      </p:sp>
+      <p:sp>
+        <p:nvSpPr>
+          <p:cNvPr id="45" name="Shape 43"/>
+          <p:cNvSpPr/>
+          <p:nvPr/>
+        </p:nvSpPr>
+        <p:spPr>
+          <a:xfrm>
+            <a:off x="7657668" y="91440"/>
+            <a:ext cx="73152" cy="274320"/>
+          </a:xfrm>
+          <a:prstGeom prst="rect">
+            <a:avLst/>
+          </a:prstGeom>
+          <a:solidFill>
+            <a:srgbClr val="0369A1"/>
+          </a:solidFill>
+          <a:ln w="12700">
+            <a:solidFill>
+              <a:srgbClr val="0369A1"/>
+            </a:solidFill>
+            <a:prstDash val="solid"/>
+          </a:ln>
+        </p:spPr>
+      </p:sp>
+      <p:pic>
+        <p:nvPicPr>
+          <p:cNvPr id="46" name="Image 0" descr="preencoded.png">    </p:cNvPr>
+          <p:cNvPicPr>
+            <a:picLocks noChangeAspect="1"/>
+          </p:cNvPicPr>
+          <p:nvPr/>
+        </p:nvPicPr>
+        <p:blipFill>
+          <a:blip r:embed="rId1"/>
+          <a:stretch>
+            <a:fillRect/>
+          </a:stretch>
+        </p:blipFill>
+        <p:spPr>
+          <a:xfrm>
+            <a:off x="7785684" y="128016"/>
+            <a:ext cx="201168" cy="201168"/>
+          </a:xfrm>
+          <a:prstGeom prst="rect">
+            <a:avLst/>
+          </a:prstGeom>
+        </p:spPr>
+      </p:pic>
+      <p:sp>
+        <p:nvSpPr>
+          <p:cNvPr id="47" name="Text 44"/>
+          <p:cNvSpPr txBox="1"/>
+          <p:nvPr/>
+        </p:nvSpPr>
+        <p:spPr>
+          <a:xfrm>
+            <a:off x="8041716" y="91440"/>
+            <a:ext cx="3564763" cy="274320"/>
+          </a:xfrm>
+          <a:prstGeom prst="rect">
+            <a:avLst/>
+          </a:prstGeom>
+          <a:noFill/>
+          <a:ln/>
+        </p:spPr>
+        <p:txBody>
+          <a:bodyPr wrap="square" lIns="0" tIns="0" rIns="0" bIns="0" rtlCol="0" anchor="ctr"/>
+          <a:lstStyle/>
+          <a:p>
+            <a:pPr indent="0" marL="0">
+              <a:buNone/>
+            </a:pPr>
+            <a:r>
+              <a:rPr lang="en-US" sz="1100" b="1" dirty="0">
+                <a:solidFill>
+                  <a:srgbClr val="075985"/>
+                </a:solidFill>
+                <a:latin typeface="Calibri" pitchFamily="34" charset="0"/>
+                <a:ea typeface="Calibri" pitchFamily="34" charset="-122"/>
+                <a:cs typeface="Calibri" pitchFamily="34" charset="-120"/>
+              </a:rPr>
+              <a:t>DA COMPRENDERE OGGI</a:t>
+            </a:r>
+            <a:pPr indent="0" marL="0">
+              <a:buNone/>
+            </a:pPr>
+            <a:r>
+              <a:rPr lang="en-US" sz="1100" dirty="0">
+                <a:solidFill>
+                  <a:srgbClr val="075985"/>
+                </a:solidFill>
+                <a:latin typeface="Calibri" pitchFamily="34" charset="0"/>
+                <a:ea typeface="Calibri" pitchFamily="34" charset="-122"/>
+                <a:cs typeface="Calibri" pitchFamily="34" charset="-120"/>
+              </a:rPr>
+              <a:t> · minimizzazione, Karnaugh</a:t>
+            </a:r>
+            <a:endParaRPr lang="en-US" sz="1100" dirty="0"/>
+          </a:p>
+        </p:txBody>
+      </p:sp>
+      <p:sp>
+        <p:nvSpPr>
           <p:cNvPr id="25" name="Slide Number Placeholder 0"/>
           <p:cNvSpPr>
             <a:spLocks noGrp="1"/>
@@ -13397,6 +14463,133 @@
       </p:sp>
       <p:sp>
         <p:nvSpPr>
+          <p:cNvPr id="16" name="Shape 14"/>
+          <p:cNvSpPr/>
+          <p:nvPr/>
+        </p:nvSpPr>
+        <p:spPr>
+          <a:xfrm>
+            <a:off x="7657668" y="91440"/>
+            <a:ext cx="3985387" cy="274320"/>
+          </a:xfrm>
+          <a:prstGeom prst="rect">
+            <a:avLst/>
+          </a:prstGeom>
+          <a:solidFill>
+            <a:srgbClr val="E0F2FE"/>
+          </a:solidFill>
+          <a:ln w="12700">
+            <a:solidFill>
+              <a:srgbClr val="0369A1"/>
+            </a:solidFill>
+            <a:prstDash val="solid"/>
+          </a:ln>
+        </p:spPr>
+      </p:sp>
+      <p:sp>
+        <p:nvSpPr>
+          <p:cNvPr id="17" name="Shape 15"/>
+          <p:cNvSpPr/>
+          <p:nvPr/>
+        </p:nvSpPr>
+        <p:spPr>
+          <a:xfrm>
+            <a:off x="7657668" y="91440"/>
+            <a:ext cx="73152" cy="274320"/>
+          </a:xfrm>
+          <a:prstGeom prst="rect">
+            <a:avLst/>
+          </a:prstGeom>
+          <a:solidFill>
+            <a:srgbClr val="0369A1"/>
+          </a:solidFill>
+          <a:ln w="12700">
+            <a:solidFill>
+              <a:srgbClr val="0369A1"/>
+            </a:solidFill>
+            <a:prstDash val="solid"/>
+          </a:ln>
+        </p:spPr>
+      </p:sp>
+      <p:pic>
+        <p:nvPicPr>
+          <p:cNvPr id="18" name="Image 0" descr="preencoded.png">    </p:cNvPr>
+          <p:cNvPicPr>
+            <a:picLocks noChangeAspect="1"/>
+          </p:cNvPicPr>
+          <p:nvPr/>
+        </p:nvPicPr>
+        <p:blipFill>
+          <a:blip r:embed="rId1"/>
+          <a:stretch>
+            <a:fillRect/>
+          </a:stretch>
+        </p:blipFill>
+        <p:spPr>
+          <a:xfrm>
+            <a:off x="7785684" y="128016"/>
+            <a:ext cx="201168" cy="201168"/>
+          </a:xfrm>
+          <a:prstGeom prst="rect">
+            <a:avLst/>
+          </a:prstGeom>
+        </p:spPr>
+      </p:pic>
+      <p:sp>
+        <p:nvSpPr>
+          <p:cNvPr id="19" name="Text 16"/>
+          <p:cNvSpPr txBox="1"/>
+          <p:nvPr/>
+        </p:nvSpPr>
+        <p:spPr>
+          <a:xfrm>
+            <a:off x="8041716" y="91440"/>
+            <a:ext cx="3564763" cy="274320"/>
+          </a:xfrm>
+          <a:prstGeom prst="rect">
+            <a:avLst/>
+          </a:prstGeom>
+          <a:noFill/>
+          <a:ln/>
+        </p:spPr>
+        <p:txBody>
+          <a:bodyPr wrap="square" lIns="0" tIns="0" rIns="0" bIns="0" rtlCol="0" anchor="ctr"/>
+          <a:lstStyle/>
+          <a:p>
+            <a:pPr indent="0" marL="0">
+              <a:buNone/>
+            </a:pPr>
+            <a:r>
+              <a:rPr lang="en-US" sz="1100" b="1" dirty="0">
+                <a:solidFill>
+                  <a:srgbClr val="075985"/>
+                </a:solidFill>
+                <a:latin typeface="Calibri" pitchFamily="34" charset="0"/>
+                <a:ea typeface="Calibri" pitchFamily="34" charset="-122"/>
+                <a:cs typeface="Calibri" pitchFamily="34" charset="-120"/>
+              </a:rPr>
+              <a:t>DA COMPRENDERE OGGI</a:t>
+            </a:r>
+            <a:pPr indent="0" marL="0">
+              <a:buNone/>
+            </a:pPr>
+            <a:r>
+              <a:rPr lang="en-US" sz="1100" dirty="0">
+                <a:solidFill>
+                  <a:srgbClr val="075985"/>
+                </a:solidFill>
+                <a:latin typeface="Calibri" pitchFamily="34" charset="0"/>
+                <a:ea typeface="Calibri" pitchFamily="34" charset="-122"/>
+                <a:cs typeface="Calibri" pitchFamily="34" charset="-120"/>
+              </a:rPr>
+              <a:t> · minimizzazione, Karnaugh</a:t>
+            </a:r>
+            <a:endParaRPr lang="en-US" sz="1100" dirty="0"/>
+          </a:p>
+        </p:txBody>
+      </p:sp>
+      <p:sp>
+        <p:nvSpPr>
           <p:cNvPr id="25" name="Slide Number Placeholder 0"/>
           <p:cNvSpPr>
             <a:spLocks noGrp="1"/>
@@ -15036,6 +16229,133 @@
               <a:t>sub usa lo stesso addizionatore: il secondo operando è complementato e il primo riporto entrante è 1 (Lezione 05)</a:t>
             </a:r>
             <a:endParaRPr lang="en-US" sz="1700" dirty="0"/>
+          </a:p>
+        </p:txBody>
+      </p:sp>
+      <p:sp>
+        <p:nvSpPr>
+          <p:cNvPr id="47" name="Shape 45"/>
+          <p:cNvSpPr/>
+          <p:nvPr/>
+        </p:nvSpPr>
+        <p:spPr>
+          <a:xfrm>
+            <a:off x="8445576" y="91440"/>
+            <a:ext cx="3197479" cy="274320"/>
+          </a:xfrm>
+          <a:prstGeom prst="rect">
+            <a:avLst/>
+          </a:prstGeom>
+          <a:solidFill>
+            <a:srgbClr val="E0F2FE"/>
+          </a:solidFill>
+          <a:ln w="12700">
+            <a:solidFill>
+              <a:srgbClr val="0369A1"/>
+            </a:solidFill>
+            <a:prstDash val="solid"/>
+          </a:ln>
+        </p:spPr>
+      </p:sp>
+      <p:sp>
+        <p:nvSpPr>
+          <p:cNvPr id="48" name="Shape 46"/>
+          <p:cNvSpPr/>
+          <p:nvPr/>
+        </p:nvSpPr>
+        <p:spPr>
+          <a:xfrm>
+            <a:off x="8445576" y="91440"/>
+            <a:ext cx="73152" cy="274320"/>
+          </a:xfrm>
+          <a:prstGeom prst="rect">
+            <a:avLst/>
+          </a:prstGeom>
+          <a:solidFill>
+            <a:srgbClr val="0369A1"/>
+          </a:solidFill>
+          <a:ln w="12700">
+            <a:solidFill>
+              <a:srgbClr val="0369A1"/>
+            </a:solidFill>
+            <a:prstDash val="solid"/>
+          </a:ln>
+        </p:spPr>
+      </p:sp>
+      <p:pic>
+        <p:nvPicPr>
+          <p:cNvPr id="49" name="Image 0" descr="preencoded.png">    </p:cNvPr>
+          <p:cNvPicPr>
+            <a:picLocks noChangeAspect="1"/>
+          </p:cNvPicPr>
+          <p:nvPr/>
+        </p:nvPicPr>
+        <p:blipFill>
+          <a:blip r:embed="rId1"/>
+          <a:stretch>
+            <a:fillRect/>
+          </a:stretch>
+        </p:blipFill>
+        <p:spPr>
+          <a:xfrm>
+            <a:off x="8573592" y="128016"/>
+            <a:ext cx="201168" cy="201168"/>
+          </a:xfrm>
+          <a:prstGeom prst="rect">
+            <a:avLst/>
+          </a:prstGeom>
+        </p:spPr>
+      </p:pic>
+      <p:sp>
+        <p:nvSpPr>
+          <p:cNvPr id="50" name="Text 47"/>
+          <p:cNvSpPr txBox="1"/>
+          <p:nvPr/>
+        </p:nvSpPr>
+        <p:spPr>
+          <a:xfrm>
+            <a:off x="8829624" y="91440"/>
+            <a:ext cx="2776855" cy="274320"/>
+          </a:xfrm>
+          <a:prstGeom prst="rect">
+            <a:avLst/>
+          </a:prstGeom>
+          <a:noFill/>
+          <a:ln/>
+        </p:spPr>
+        <p:txBody>
+          <a:bodyPr wrap="square" lIns="0" tIns="0" rIns="0" bIns="0" rtlCol="0" anchor="ctr"/>
+          <a:lstStyle/>
+          <a:p>
+            <a:pPr indent="0" marL="0">
+              <a:buNone/>
+            </a:pPr>
+            <a:r>
+              <a:rPr lang="en-US" sz="1100" b="1" dirty="0">
+                <a:solidFill>
+                  <a:srgbClr val="075985"/>
+                </a:solidFill>
+                <a:latin typeface="Calibri" pitchFamily="34" charset="0"/>
+                <a:ea typeface="Calibri" pitchFamily="34" charset="-122"/>
+                <a:cs typeface="Calibri" pitchFamily="34" charset="-120"/>
+              </a:rPr>
+              <a:t>DA COMPRENDERE OGGI</a:t>
+            </a:r>
+            <a:pPr indent="0" marL="0">
+              <a:buNone/>
+            </a:pPr>
+            <a:r>
+              <a:rPr lang="en-US" sz="1100" dirty="0">
+                <a:solidFill>
+                  <a:srgbClr val="075985"/>
+                </a:solidFill>
+                <a:latin typeface="Calibri" pitchFamily="34" charset="0"/>
+                <a:ea typeface="Calibri" pitchFamily="34" charset="-122"/>
+                <a:cs typeface="Calibri" pitchFamily="34" charset="-120"/>
+              </a:rPr>
+              <a:t> · il sommatore</a:t>
+            </a:r>
+            <a:endParaRPr lang="en-US" sz="1100" dirty="0"/>
           </a:p>
         </p:txBody>
       </p:sp>
@@ -21062,6 +22382,133 @@
       </p:sp>
       <p:sp>
         <p:nvSpPr>
+          <p:cNvPr id="11" name="Shape 9"/>
+          <p:cNvSpPr/>
+          <p:nvPr/>
+        </p:nvSpPr>
+        <p:spPr>
+          <a:xfrm>
+            <a:off x="7920304" y="91440"/>
+            <a:ext cx="3722751" cy="274320"/>
+          </a:xfrm>
+          <a:prstGeom prst="rect">
+            <a:avLst/>
+          </a:prstGeom>
+          <a:solidFill>
+            <a:srgbClr val="E0F2FE"/>
+          </a:solidFill>
+          <a:ln w="12700">
+            <a:solidFill>
+              <a:srgbClr val="0369A1"/>
+            </a:solidFill>
+            <a:prstDash val="solid"/>
+          </a:ln>
+        </p:spPr>
+      </p:sp>
+      <p:sp>
+        <p:nvSpPr>
+          <p:cNvPr id="12" name="Shape 10"/>
+          <p:cNvSpPr/>
+          <p:nvPr/>
+        </p:nvSpPr>
+        <p:spPr>
+          <a:xfrm>
+            <a:off x="7920304" y="91440"/>
+            <a:ext cx="73152" cy="274320"/>
+          </a:xfrm>
+          <a:prstGeom prst="rect">
+            <a:avLst/>
+          </a:prstGeom>
+          <a:solidFill>
+            <a:srgbClr val="0369A1"/>
+          </a:solidFill>
+          <a:ln w="12700">
+            <a:solidFill>
+              <a:srgbClr val="0369A1"/>
+            </a:solidFill>
+            <a:prstDash val="solid"/>
+          </a:ln>
+        </p:spPr>
+      </p:sp>
+      <p:pic>
+        <p:nvPicPr>
+          <p:cNvPr id="13" name="Image 0" descr="preencoded.png">    </p:cNvPr>
+          <p:cNvPicPr>
+            <a:picLocks noChangeAspect="1"/>
+          </p:cNvPicPr>
+          <p:nvPr/>
+        </p:nvPicPr>
+        <p:blipFill>
+          <a:blip r:embed="rId1"/>
+          <a:stretch>
+            <a:fillRect/>
+          </a:stretch>
+        </p:blipFill>
+        <p:spPr>
+          <a:xfrm>
+            <a:off x="8048320" y="128016"/>
+            <a:ext cx="201168" cy="201168"/>
+          </a:xfrm>
+          <a:prstGeom prst="rect">
+            <a:avLst/>
+          </a:prstGeom>
+        </p:spPr>
+      </p:pic>
+      <p:sp>
+        <p:nvSpPr>
+          <p:cNvPr id="14" name="Text 11"/>
+          <p:cNvSpPr txBox="1"/>
+          <p:nvPr/>
+        </p:nvSpPr>
+        <p:spPr>
+          <a:xfrm>
+            <a:off x="8304352" y="91440"/>
+            <a:ext cx="3302127" cy="274320"/>
+          </a:xfrm>
+          <a:prstGeom prst="rect">
+            <a:avLst/>
+          </a:prstGeom>
+          <a:noFill/>
+          <a:ln/>
+        </p:spPr>
+        <p:txBody>
+          <a:bodyPr wrap="square" lIns="0" tIns="0" rIns="0" bIns="0" rtlCol="0" anchor="ctr"/>
+          <a:lstStyle/>
+          <a:p>
+            <a:pPr indent="0" marL="0">
+              <a:buNone/>
+            </a:pPr>
+            <a:r>
+              <a:rPr lang="en-US" sz="1100" b="1" dirty="0">
+                <a:solidFill>
+                  <a:srgbClr val="075985"/>
+                </a:solidFill>
+                <a:latin typeface="Calibri" pitchFamily="34" charset="0"/>
+                <a:ea typeface="Calibri" pitchFamily="34" charset="-122"/>
+                <a:cs typeface="Calibri" pitchFamily="34" charset="-120"/>
+              </a:rPr>
+              <a:t>DA COMPRENDERE OGGI</a:t>
+            </a:r>
+            <a:pPr indent="0" marL="0">
+              <a:buNone/>
+            </a:pPr>
+            <a:r>
+              <a:rPr lang="en-US" sz="1100" dirty="0">
+                <a:solidFill>
+                  <a:srgbClr val="075985"/>
+                </a:solidFill>
+                <a:latin typeface="Calibri" pitchFamily="34" charset="0"/>
+                <a:ea typeface="Calibri" pitchFamily="34" charset="-122"/>
+                <a:cs typeface="Calibri" pitchFamily="34" charset="-120"/>
+              </a:rPr>
+              <a:t> · le funzioni booleane</a:t>
+            </a:r>
+            <a:endParaRPr lang="en-US" sz="1100" dirty="0"/>
+          </a:p>
+        </p:txBody>
+      </p:sp>
+      <p:sp>
+        <p:nvSpPr>
           <p:cNvPr id="25" name="Slide Number Placeholder 0"/>
           <p:cNvSpPr>
             <a:spLocks noGrp="1"/>
@@ -21564,6 +23011,133 @@
               <a:t>il numero di funzioni booleane distinte di n variabili</a:t>
             </a:r>
             <a:endParaRPr lang="en-US" sz="1900" dirty="0"/>
+          </a:p>
+        </p:txBody>
+      </p:sp>
+      <p:sp>
+        <p:nvSpPr>
+          <p:cNvPr id="14" name="Shape 12"/>
+          <p:cNvSpPr/>
+          <p:nvPr/>
+        </p:nvSpPr>
+        <p:spPr>
+          <a:xfrm>
+            <a:off x="7920304" y="91440"/>
+            <a:ext cx="3722751" cy="274320"/>
+          </a:xfrm>
+          <a:prstGeom prst="rect">
+            <a:avLst/>
+          </a:prstGeom>
+          <a:solidFill>
+            <a:srgbClr val="E0F2FE"/>
+          </a:solidFill>
+          <a:ln w="12700">
+            <a:solidFill>
+              <a:srgbClr val="0369A1"/>
+            </a:solidFill>
+            <a:prstDash val="solid"/>
+          </a:ln>
+        </p:spPr>
+      </p:sp>
+      <p:sp>
+        <p:nvSpPr>
+          <p:cNvPr id="15" name="Shape 13"/>
+          <p:cNvSpPr/>
+          <p:nvPr/>
+        </p:nvSpPr>
+        <p:spPr>
+          <a:xfrm>
+            <a:off x="7920304" y="91440"/>
+            <a:ext cx="73152" cy="274320"/>
+          </a:xfrm>
+          <a:prstGeom prst="rect">
+            <a:avLst/>
+          </a:prstGeom>
+          <a:solidFill>
+            <a:srgbClr val="0369A1"/>
+          </a:solidFill>
+          <a:ln w="12700">
+            <a:solidFill>
+              <a:srgbClr val="0369A1"/>
+            </a:solidFill>
+            <a:prstDash val="solid"/>
+          </a:ln>
+        </p:spPr>
+      </p:sp>
+      <p:pic>
+        <p:nvPicPr>
+          <p:cNvPr id="16" name="Image 0" descr="preencoded.png">    </p:cNvPr>
+          <p:cNvPicPr>
+            <a:picLocks noChangeAspect="1"/>
+          </p:cNvPicPr>
+          <p:nvPr/>
+        </p:nvPicPr>
+        <p:blipFill>
+          <a:blip r:embed="rId1"/>
+          <a:stretch>
+            <a:fillRect/>
+          </a:stretch>
+        </p:blipFill>
+        <p:spPr>
+          <a:xfrm>
+            <a:off x="8048320" y="128016"/>
+            <a:ext cx="201168" cy="201168"/>
+          </a:xfrm>
+          <a:prstGeom prst="rect">
+            <a:avLst/>
+          </a:prstGeom>
+        </p:spPr>
+      </p:pic>
+      <p:sp>
+        <p:nvSpPr>
+          <p:cNvPr id="17" name="Text 14"/>
+          <p:cNvSpPr txBox="1"/>
+          <p:nvPr/>
+        </p:nvSpPr>
+        <p:spPr>
+          <a:xfrm>
+            <a:off x="8304352" y="91440"/>
+            <a:ext cx="3302127" cy="274320"/>
+          </a:xfrm>
+          <a:prstGeom prst="rect">
+            <a:avLst/>
+          </a:prstGeom>
+          <a:noFill/>
+          <a:ln/>
+        </p:spPr>
+        <p:txBody>
+          <a:bodyPr wrap="square" lIns="0" tIns="0" rIns="0" bIns="0" rtlCol="0" anchor="ctr"/>
+          <a:lstStyle/>
+          <a:p>
+            <a:pPr indent="0" marL="0">
+              <a:buNone/>
+            </a:pPr>
+            <a:r>
+              <a:rPr lang="en-US" sz="1100" b="1" dirty="0">
+                <a:solidFill>
+                  <a:srgbClr val="075985"/>
+                </a:solidFill>
+                <a:latin typeface="Calibri" pitchFamily="34" charset="0"/>
+                <a:ea typeface="Calibri" pitchFamily="34" charset="-122"/>
+                <a:cs typeface="Calibri" pitchFamily="34" charset="-120"/>
+              </a:rPr>
+              <a:t>DA COMPRENDERE OGGI</a:t>
+            </a:r>
+            <a:pPr indent="0" marL="0">
+              <a:buNone/>
+            </a:pPr>
+            <a:r>
+              <a:rPr lang="en-US" sz="1100" dirty="0">
+                <a:solidFill>
+                  <a:srgbClr val="075985"/>
+                </a:solidFill>
+                <a:latin typeface="Calibri" pitchFamily="34" charset="0"/>
+                <a:ea typeface="Calibri" pitchFamily="34" charset="-122"/>
+                <a:cs typeface="Calibri" pitchFamily="34" charset="-120"/>
+              </a:rPr>
+              <a:t> · le funzioni booleane</a:t>
+            </a:r>
+            <a:endParaRPr lang="en-US" sz="1100" dirty="0"/>
           </a:p>
         </p:txBody>
       </p:sp>
@@ -29209,6 +30783,133 @@
       </p:sp>
       <p:sp>
         <p:nvSpPr>
+          <p:cNvPr id="7" name="Shape 3"/>
+          <p:cNvSpPr/>
+          <p:nvPr/>
+        </p:nvSpPr>
+        <p:spPr>
+          <a:xfrm>
+            <a:off x="7920304" y="91440"/>
+            <a:ext cx="3722751" cy="274320"/>
+          </a:xfrm>
+          <a:prstGeom prst="rect">
+            <a:avLst/>
+          </a:prstGeom>
+          <a:solidFill>
+            <a:srgbClr val="E0F2FE"/>
+          </a:solidFill>
+          <a:ln w="12700">
+            <a:solidFill>
+              <a:srgbClr val="0369A1"/>
+            </a:solidFill>
+            <a:prstDash val="solid"/>
+          </a:ln>
+        </p:spPr>
+      </p:sp>
+      <p:sp>
+        <p:nvSpPr>
+          <p:cNvPr id="8" name="Shape 4"/>
+          <p:cNvSpPr/>
+          <p:nvPr/>
+        </p:nvSpPr>
+        <p:spPr>
+          <a:xfrm>
+            <a:off x="7920304" y="91440"/>
+            <a:ext cx="73152" cy="274320"/>
+          </a:xfrm>
+          <a:prstGeom prst="rect">
+            <a:avLst/>
+          </a:prstGeom>
+          <a:solidFill>
+            <a:srgbClr val="0369A1"/>
+          </a:solidFill>
+          <a:ln w="12700">
+            <a:solidFill>
+              <a:srgbClr val="0369A1"/>
+            </a:solidFill>
+            <a:prstDash val="solid"/>
+          </a:ln>
+        </p:spPr>
+      </p:sp>
+      <p:pic>
+        <p:nvPicPr>
+          <p:cNvPr id="9" name="Image 0" descr="preencoded.png">    </p:cNvPr>
+          <p:cNvPicPr>
+            <a:picLocks noChangeAspect="1"/>
+          </p:cNvPicPr>
+          <p:nvPr/>
+        </p:nvPicPr>
+        <p:blipFill>
+          <a:blip r:embed="rId1"/>
+          <a:stretch>
+            <a:fillRect/>
+          </a:stretch>
+        </p:blipFill>
+        <p:spPr>
+          <a:xfrm>
+            <a:off x="8048320" y="128016"/>
+            <a:ext cx="201168" cy="201168"/>
+          </a:xfrm>
+          <a:prstGeom prst="rect">
+            <a:avLst/>
+          </a:prstGeom>
+        </p:spPr>
+      </p:pic>
+      <p:sp>
+        <p:nvSpPr>
+          <p:cNvPr id="10" name="Text 5"/>
+          <p:cNvSpPr txBox="1"/>
+          <p:nvPr/>
+        </p:nvSpPr>
+        <p:spPr>
+          <a:xfrm>
+            <a:off x="8304352" y="91440"/>
+            <a:ext cx="3302127" cy="274320"/>
+          </a:xfrm>
+          <a:prstGeom prst="rect">
+            <a:avLst/>
+          </a:prstGeom>
+          <a:noFill/>
+          <a:ln/>
+        </p:spPr>
+        <p:txBody>
+          <a:bodyPr wrap="square" lIns="0" tIns="0" rIns="0" bIns="0" rtlCol="0" anchor="ctr"/>
+          <a:lstStyle/>
+          <a:p>
+            <a:pPr indent="0" marL="0">
+              <a:buNone/>
+            </a:pPr>
+            <a:r>
+              <a:rPr lang="en-US" sz="1100" b="1" dirty="0">
+                <a:solidFill>
+                  <a:srgbClr val="075985"/>
+                </a:solidFill>
+                <a:latin typeface="Calibri" pitchFamily="34" charset="0"/>
+                <a:ea typeface="Calibri" pitchFamily="34" charset="-122"/>
+                <a:cs typeface="Calibri" pitchFamily="34" charset="-120"/>
+              </a:rPr>
+              <a:t>DA COMPRENDERE OGGI</a:t>
+            </a:r>
+            <a:pPr indent="0" marL="0">
+              <a:buNone/>
+            </a:pPr>
+            <a:r>
+              <a:rPr lang="en-US" sz="1100" dirty="0">
+                <a:solidFill>
+                  <a:srgbClr val="075985"/>
+                </a:solidFill>
+                <a:latin typeface="Calibri" pitchFamily="34" charset="0"/>
+                <a:ea typeface="Calibri" pitchFamily="34" charset="-122"/>
+                <a:cs typeface="Calibri" pitchFamily="34" charset="-120"/>
+              </a:rPr>
+              <a:t> · le funzioni booleane</a:t>
+            </a:r>
+            <a:endParaRPr lang="en-US" sz="1100" dirty="0"/>
+          </a:p>
+        </p:txBody>
+      </p:sp>
+      <p:sp>
+        <p:nvSpPr>
           <p:cNvPr id="25" name="Slide Number Placeholder 0"/>
           <p:cNvSpPr>
             <a:spLocks noGrp="1"/>
@@ -29758,6 +31459,133 @@
               <a:t>un solo tipo di porta basta a costruire qualunque circuito digitale, compreso un intero processore</a:t>
             </a:r>
             <a:endParaRPr lang="en-US" sz="1900" dirty="0"/>
+          </a:p>
+        </p:txBody>
+      </p:sp>
+      <p:sp>
+        <p:nvSpPr>
+          <p:cNvPr id="16" name="Shape 14"/>
+          <p:cNvSpPr/>
+          <p:nvPr/>
+        </p:nvSpPr>
+        <p:spPr>
+          <a:xfrm>
+            <a:off x="7920304" y="91440"/>
+            <a:ext cx="3722751" cy="274320"/>
+          </a:xfrm>
+          <a:prstGeom prst="rect">
+            <a:avLst/>
+          </a:prstGeom>
+          <a:solidFill>
+            <a:srgbClr val="E0F2FE"/>
+          </a:solidFill>
+          <a:ln w="12700">
+            <a:solidFill>
+              <a:srgbClr val="0369A1"/>
+            </a:solidFill>
+            <a:prstDash val="solid"/>
+          </a:ln>
+        </p:spPr>
+      </p:sp>
+      <p:sp>
+        <p:nvSpPr>
+          <p:cNvPr id="17" name="Shape 15"/>
+          <p:cNvSpPr/>
+          <p:nvPr/>
+        </p:nvSpPr>
+        <p:spPr>
+          <a:xfrm>
+            <a:off x="7920304" y="91440"/>
+            <a:ext cx="73152" cy="274320"/>
+          </a:xfrm>
+          <a:prstGeom prst="rect">
+            <a:avLst/>
+          </a:prstGeom>
+          <a:solidFill>
+            <a:srgbClr val="0369A1"/>
+          </a:solidFill>
+          <a:ln w="12700">
+            <a:solidFill>
+              <a:srgbClr val="0369A1"/>
+            </a:solidFill>
+            <a:prstDash val="solid"/>
+          </a:ln>
+        </p:spPr>
+      </p:sp>
+      <p:pic>
+        <p:nvPicPr>
+          <p:cNvPr id="18" name="Image 0" descr="preencoded.png">    </p:cNvPr>
+          <p:cNvPicPr>
+            <a:picLocks noChangeAspect="1"/>
+          </p:cNvPicPr>
+          <p:nvPr/>
+        </p:nvPicPr>
+        <p:blipFill>
+          <a:blip r:embed="rId1"/>
+          <a:stretch>
+            <a:fillRect/>
+          </a:stretch>
+        </p:blipFill>
+        <p:spPr>
+          <a:xfrm>
+            <a:off x="8048320" y="128016"/>
+            <a:ext cx="201168" cy="201168"/>
+          </a:xfrm>
+          <a:prstGeom prst="rect">
+            <a:avLst/>
+          </a:prstGeom>
+        </p:spPr>
+      </p:pic>
+      <p:sp>
+        <p:nvSpPr>
+          <p:cNvPr id="19" name="Text 16"/>
+          <p:cNvSpPr txBox="1"/>
+          <p:nvPr/>
+        </p:nvSpPr>
+        <p:spPr>
+          <a:xfrm>
+            <a:off x="8304352" y="91440"/>
+            <a:ext cx="3302127" cy="274320"/>
+          </a:xfrm>
+          <a:prstGeom prst="rect">
+            <a:avLst/>
+          </a:prstGeom>
+          <a:noFill/>
+          <a:ln/>
+        </p:spPr>
+        <p:txBody>
+          <a:bodyPr wrap="square" lIns="0" tIns="0" rIns="0" bIns="0" rtlCol="0" anchor="ctr"/>
+          <a:lstStyle/>
+          <a:p>
+            <a:pPr indent="0" marL="0">
+              <a:buNone/>
+            </a:pPr>
+            <a:r>
+              <a:rPr lang="en-US" sz="1100" b="1" dirty="0">
+                <a:solidFill>
+                  <a:srgbClr val="075985"/>
+                </a:solidFill>
+                <a:latin typeface="Calibri" pitchFamily="34" charset="0"/>
+                <a:ea typeface="Calibri" pitchFamily="34" charset="-122"/>
+                <a:cs typeface="Calibri" pitchFamily="34" charset="-120"/>
+              </a:rPr>
+              <a:t>DA COMPRENDERE OGGI</a:t>
+            </a:r>
+            <a:pPr indent="0" marL="0">
+              <a:buNone/>
+            </a:pPr>
+            <a:r>
+              <a:rPr lang="en-US" sz="1100" dirty="0">
+                <a:solidFill>
+                  <a:srgbClr val="075985"/>
+                </a:solidFill>
+                <a:latin typeface="Calibri" pitchFamily="34" charset="0"/>
+                <a:ea typeface="Calibri" pitchFamily="34" charset="-122"/>
+                <a:cs typeface="Calibri" pitchFamily="34" charset="-120"/>
+              </a:rPr>
+              <a:t> · le funzioni booleane</a:t>
+            </a:r>
+            <a:endParaRPr lang="en-US" sz="1100" dirty="0"/>
           </a:p>
         </p:txBody>
       </p:sp>
@@ -31544,9 +33372,59 @@
           </a:ln>
         </p:spPr>
       </p:sp>
+      <p:sp>
+        <p:nvSpPr>
+          <p:cNvPr id="12" name="Shape 9"/>
+          <p:cNvSpPr/>
+          <p:nvPr/>
+        </p:nvSpPr>
+        <p:spPr>
+          <a:xfrm>
+            <a:off x="8445576" y="91440"/>
+            <a:ext cx="3197479" cy="274320"/>
+          </a:xfrm>
+          <a:prstGeom prst="rect">
+            <a:avLst/>
+          </a:prstGeom>
+          <a:solidFill>
+            <a:srgbClr val="E0F2FE"/>
+          </a:solidFill>
+          <a:ln w="12700">
+            <a:solidFill>
+              <a:srgbClr val="0369A1"/>
+            </a:solidFill>
+            <a:prstDash val="solid"/>
+          </a:ln>
+        </p:spPr>
+      </p:sp>
+      <p:sp>
+        <p:nvSpPr>
+          <p:cNvPr id="13" name="Shape 10"/>
+          <p:cNvSpPr/>
+          <p:nvPr/>
+        </p:nvSpPr>
+        <p:spPr>
+          <a:xfrm>
+            <a:off x="8445576" y="91440"/>
+            <a:ext cx="73152" cy="274320"/>
+          </a:xfrm>
+          <a:prstGeom prst="rect">
+            <a:avLst/>
+          </a:prstGeom>
+          <a:solidFill>
+            <a:srgbClr val="0369A1"/>
+          </a:solidFill>
+          <a:ln w="12700">
+            <a:solidFill>
+              <a:srgbClr val="0369A1"/>
+            </a:solidFill>
+            <a:prstDash val="solid"/>
+          </a:ln>
+        </p:spPr>
+      </p:sp>
       <p:pic>
         <p:nvPicPr>
-          <p:cNvPr id="13" name="Image 0" descr="preencoded.png">    </p:cNvPr>
+          <p:cNvPr id="14" name="Image 0" descr="preencoded.png">    </p:cNvPr>
           <p:cNvPicPr>
             <a:picLocks noChangeAspect="1"/>
           </p:cNvPicPr>
@@ -31554,6 +33432,83 @@
         </p:nvPicPr>
         <p:blipFill>
           <a:blip r:embed="rId1"/>
+          <a:stretch>
+            <a:fillRect/>
+          </a:stretch>
+        </p:blipFill>
+        <p:spPr>
+          <a:xfrm>
+            <a:off x="8573592" y="128016"/>
+            <a:ext cx="201168" cy="201168"/>
+          </a:xfrm>
+          <a:prstGeom prst="rect">
+            <a:avLst/>
+          </a:prstGeom>
+        </p:spPr>
+      </p:pic>
+      <p:sp>
+        <p:nvSpPr>
+          <p:cNvPr id="15" name="Text 11"/>
+          <p:cNvSpPr txBox="1"/>
+          <p:nvPr/>
+        </p:nvSpPr>
+        <p:spPr>
+          <a:xfrm>
+            <a:off x="8829624" y="91440"/>
+            <a:ext cx="2776855" cy="274320"/>
+          </a:xfrm>
+          <a:prstGeom prst="rect">
+            <a:avLst/>
+          </a:prstGeom>
+          <a:noFill/>
+          <a:ln/>
+        </p:spPr>
+        <p:txBody>
+          <a:bodyPr wrap="square" lIns="0" tIns="0" rIns="0" bIns="0" rtlCol="0" anchor="ctr"/>
+          <a:lstStyle/>
+          <a:p>
+            <a:pPr indent="0" marL="0">
+              <a:buNone/>
+            </a:pPr>
+            <a:r>
+              <a:rPr lang="en-US" sz="1100" b="1" dirty="0">
+                <a:solidFill>
+                  <a:srgbClr val="075985"/>
+                </a:solidFill>
+                <a:latin typeface="Calibri" pitchFamily="34" charset="0"/>
+                <a:ea typeface="Calibri" pitchFamily="34" charset="-122"/>
+                <a:cs typeface="Calibri" pitchFamily="34" charset="-120"/>
+              </a:rPr>
+              <a:t>DA COMPRENDERE OGGI</a:t>
+            </a:r>
+            <a:pPr indent="0" marL="0">
+              <a:buNone/>
+            </a:pPr>
+            <a:r>
+              <a:rPr lang="en-US" sz="1100" dirty="0">
+                <a:solidFill>
+                  <a:srgbClr val="075985"/>
+                </a:solidFill>
+                <a:latin typeface="Calibri" pitchFamily="34" charset="0"/>
+                <a:ea typeface="Calibri" pitchFamily="34" charset="-122"/>
+                <a:cs typeface="Calibri" pitchFamily="34" charset="-120"/>
+              </a:rPr>
+              <a:t> · il sommatore</a:t>
+            </a:r>
+            <a:endParaRPr lang="en-US" sz="1100" dirty="0"/>
+          </a:p>
+        </p:txBody>
+      </p:sp>
+      <p:pic>
+        <p:nvPicPr>
+          <p:cNvPr id="17" name="Image 1" descr="preencoded.png">    </p:cNvPr>
+          <p:cNvPicPr>
+            <a:picLocks noChangeAspect="1"/>
+          </p:cNvPicPr>
+          <p:nvPr/>
+        </p:nvPicPr>
+        <p:blipFill>
+          <a:blip r:embed="rId2"/>
           <a:stretch>
             <a:fillRect/>
           </a:stretch>
@@ -34937,9 +36892,59 @@
           </a:ln>
         </p:spPr>
       </p:sp>
+      <p:sp>
+        <p:nvSpPr>
+          <p:cNvPr id="8" name="Shape 5"/>
+          <p:cNvSpPr/>
+          <p:nvPr/>
+        </p:nvSpPr>
+        <p:spPr>
+          <a:xfrm>
+            <a:off x="8445576" y="91440"/>
+            <a:ext cx="3197479" cy="274320"/>
+          </a:xfrm>
+          <a:prstGeom prst="rect">
+            <a:avLst/>
+          </a:prstGeom>
+          <a:solidFill>
+            <a:srgbClr val="E0F2FE"/>
+          </a:solidFill>
+          <a:ln w="12700">
+            <a:solidFill>
+              <a:srgbClr val="0369A1"/>
+            </a:solidFill>
+            <a:prstDash val="solid"/>
+          </a:ln>
+        </p:spPr>
+      </p:sp>
+      <p:sp>
+        <p:nvSpPr>
+          <p:cNvPr id="9" name="Shape 6"/>
+          <p:cNvSpPr/>
+          <p:nvPr/>
+        </p:nvSpPr>
+        <p:spPr>
+          <a:xfrm>
+            <a:off x="8445576" y="91440"/>
+            <a:ext cx="73152" cy="274320"/>
+          </a:xfrm>
+          <a:prstGeom prst="rect">
+            <a:avLst/>
+          </a:prstGeom>
+          <a:solidFill>
+            <a:srgbClr val="0369A1"/>
+          </a:solidFill>
+          <a:ln w="12700">
+            <a:solidFill>
+              <a:srgbClr val="0369A1"/>
+            </a:solidFill>
+            <a:prstDash val="solid"/>
+          </a:ln>
+        </p:spPr>
+      </p:sp>
       <p:pic>
         <p:nvPicPr>
-          <p:cNvPr id="9" name="Image 0" descr="preencoded.png">    </p:cNvPr>
+          <p:cNvPr id="10" name="Image 0" descr="preencoded.png">    </p:cNvPr>
           <p:cNvPicPr>
             <a:picLocks noChangeAspect="1"/>
           </p:cNvPicPr>
@@ -34947,6 +36952,83 @@
         </p:nvPicPr>
         <p:blipFill>
           <a:blip r:embed="rId1"/>
+          <a:stretch>
+            <a:fillRect/>
+          </a:stretch>
+        </p:blipFill>
+        <p:spPr>
+          <a:xfrm>
+            <a:off x="8573592" y="128016"/>
+            <a:ext cx="201168" cy="201168"/>
+          </a:xfrm>
+          <a:prstGeom prst="rect">
+            <a:avLst/>
+          </a:prstGeom>
+        </p:spPr>
+      </p:pic>
+      <p:sp>
+        <p:nvSpPr>
+          <p:cNvPr id="11" name="Text 7"/>
+          <p:cNvSpPr txBox="1"/>
+          <p:nvPr/>
+        </p:nvSpPr>
+        <p:spPr>
+          <a:xfrm>
+            <a:off x="8829624" y="91440"/>
+            <a:ext cx="2776855" cy="274320"/>
+          </a:xfrm>
+          <a:prstGeom prst="rect">
+            <a:avLst/>
+          </a:prstGeom>
+          <a:noFill/>
+          <a:ln/>
+        </p:spPr>
+        <p:txBody>
+          <a:bodyPr wrap="square" lIns="0" tIns="0" rIns="0" bIns="0" rtlCol="0" anchor="ctr"/>
+          <a:lstStyle/>
+          <a:p>
+            <a:pPr indent="0" marL="0">
+              <a:buNone/>
+            </a:pPr>
+            <a:r>
+              <a:rPr lang="en-US" sz="1100" b="1" dirty="0">
+                <a:solidFill>
+                  <a:srgbClr val="075985"/>
+                </a:solidFill>
+                <a:latin typeface="Calibri" pitchFamily="34" charset="0"/>
+                <a:ea typeface="Calibri" pitchFamily="34" charset="-122"/>
+                <a:cs typeface="Calibri" pitchFamily="34" charset="-120"/>
+              </a:rPr>
+              <a:t>DA COMPRENDERE OGGI</a:t>
+            </a:r>
+            <a:pPr indent="0" marL="0">
+              <a:buNone/>
+            </a:pPr>
+            <a:r>
+              <a:rPr lang="en-US" sz="1100" dirty="0">
+                <a:solidFill>
+                  <a:srgbClr val="075985"/>
+                </a:solidFill>
+                <a:latin typeface="Calibri" pitchFamily="34" charset="0"/>
+                <a:ea typeface="Calibri" pitchFamily="34" charset="-122"/>
+                <a:cs typeface="Calibri" pitchFamily="34" charset="-120"/>
+              </a:rPr>
+              <a:t> · il sommatore</a:t>
+            </a:r>
+            <a:endParaRPr lang="en-US" sz="1100" dirty="0"/>
+          </a:p>
+        </p:txBody>
+      </p:sp>
+      <p:pic>
+        <p:nvPicPr>
+          <p:cNvPr id="13" name="Image 1" descr="preencoded.png">    </p:cNvPr>
+          <p:cNvPicPr>
+            <a:picLocks noChangeAspect="1"/>
+          </p:cNvPicPr>
+          <p:nvPr/>
+        </p:nvPicPr>
+        <p:blipFill>
+          <a:blip r:embed="rId2"/>
           <a:stretch>
             <a:fillRect/>
           </a:stretch>
@@ -35380,6 +37462,133 @@
               <a:t>Un maxtermine vale 0 per una e una sola riga della tabella di verità</a:t>
             </a:r>
             <a:endParaRPr lang="en-US" sz="2400" dirty="0"/>
+          </a:p>
+        </p:txBody>
+      </p:sp>
+      <p:sp>
+        <p:nvSpPr>
+          <p:cNvPr id="11" name="Shape 9"/>
+          <p:cNvSpPr/>
+          <p:nvPr/>
+        </p:nvSpPr>
+        <p:spPr>
+          <a:xfrm>
+            <a:off x="8051622" y="91440"/>
+            <a:ext cx="3591433" cy="274320"/>
+          </a:xfrm>
+          <a:prstGeom prst="rect">
+            <a:avLst/>
+          </a:prstGeom>
+          <a:solidFill>
+            <a:srgbClr val="E0F2FE"/>
+          </a:solidFill>
+          <a:ln w="12700">
+            <a:solidFill>
+              <a:srgbClr val="0369A1"/>
+            </a:solidFill>
+            <a:prstDash val="solid"/>
+          </a:ln>
+        </p:spPr>
+      </p:sp>
+      <p:sp>
+        <p:nvSpPr>
+          <p:cNvPr id="12" name="Shape 10"/>
+          <p:cNvSpPr/>
+          <p:nvPr/>
+        </p:nvSpPr>
+        <p:spPr>
+          <a:xfrm>
+            <a:off x="8051622" y="91440"/>
+            <a:ext cx="73152" cy="274320"/>
+          </a:xfrm>
+          <a:prstGeom prst="rect">
+            <a:avLst/>
+          </a:prstGeom>
+          <a:solidFill>
+            <a:srgbClr val="0369A1"/>
+          </a:solidFill>
+          <a:ln w="12700">
+            <a:solidFill>
+              <a:srgbClr val="0369A1"/>
+            </a:solidFill>
+            <a:prstDash val="solid"/>
+          </a:ln>
+        </p:spPr>
+      </p:sp>
+      <p:pic>
+        <p:nvPicPr>
+          <p:cNvPr id="13" name="Image 0" descr="preencoded.png">    </p:cNvPr>
+          <p:cNvPicPr>
+            <a:picLocks noChangeAspect="1"/>
+          </p:cNvPicPr>
+          <p:nvPr/>
+        </p:nvPicPr>
+        <p:blipFill>
+          <a:blip r:embed="rId1"/>
+          <a:stretch>
+            <a:fillRect/>
+          </a:stretch>
+        </p:blipFill>
+        <p:spPr>
+          <a:xfrm>
+            <a:off x="8179638" y="128016"/>
+            <a:ext cx="201168" cy="201168"/>
+          </a:xfrm>
+          <a:prstGeom prst="rect">
+            <a:avLst/>
+          </a:prstGeom>
+        </p:spPr>
+      </p:pic>
+      <p:sp>
+        <p:nvSpPr>
+          <p:cNvPr id="14" name="Text 11"/>
+          <p:cNvSpPr txBox="1"/>
+          <p:nvPr/>
+        </p:nvSpPr>
+        <p:spPr>
+          <a:xfrm>
+            <a:off x="8435670" y="91440"/>
+            <a:ext cx="3170809" cy="274320"/>
+          </a:xfrm>
+          <a:prstGeom prst="rect">
+            <a:avLst/>
+          </a:prstGeom>
+          <a:noFill/>
+          <a:ln/>
+        </p:spPr>
+        <p:txBody>
+          <a:bodyPr wrap="square" lIns="0" tIns="0" rIns="0" bIns="0" rtlCol="0" anchor="ctr"/>
+          <a:lstStyle/>
+          <a:p>
+            <a:pPr indent="0" marL="0">
+              <a:buNone/>
+            </a:pPr>
+            <a:r>
+              <a:rPr lang="en-US" sz="1100" b="1" dirty="0">
+                <a:solidFill>
+                  <a:srgbClr val="075985"/>
+                </a:solidFill>
+                <a:latin typeface="Calibri" pitchFamily="34" charset="0"/>
+                <a:ea typeface="Calibri" pitchFamily="34" charset="-122"/>
+                <a:cs typeface="Calibri" pitchFamily="34" charset="-120"/>
+              </a:rPr>
+              <a:t>DA COMPRENDERE OGGI</a:t>
+            </a:r>
+            <a:pPr indent="0" marL="0">
+              <a:buNone/>
+            </a:pPr>
+            <a:r>
+              <a:rPr lang="en-US" sz="1100" dirty="0">
+                <a:solidFill>
+                  <a:srgbClr val="075985"/>
+                </a:solidFill>
+                <a:latin typeface="Calibri" pitchFamily="34" charset="0"/>
+                <a:ea typeface="Calibri" pitchFamily="34" charset="-122"/>
+                <a:cs typeface="Calibri" pitchFamily="34" charset="-120"/>
+              </a:rPr>
+              <a:t> · le forme canoniche</a:t>
+            </a:r>
+            <a:endParaRPr lang="en-US" sz="1100" dirty="0"/>
           </a:p>
         </p:txBody>
       </p:sp>

--- a/it/slides/09-Architettura_dei_Calcolatori-Algebra_di_Boole_2.pptx
+++ b/it/slides/09-Architettura_dei_Calcolatori-Algebra_di_Boole_2.pptx
@@ -126,13 +126,13 @@
   <p:extLst>
     <p:ext uri="{521415D9-36F7-43E2-AB2F-B90AF26B5E84}">
       <p14:sectionLst xmlns:p14="http://schemas.microsoft.com/office/powerpoint/2010/main">
-        <p14:section name="Apertura" id="{78358b13-a4f0-c2c7-d57a-b015eb1ffc94}">
+        <p14:section name="Apertura" id="{04e3c99c-c835-f128-f26c-68d823ff2c09}">
           <p14:sldIdLst>
             <p14:sldId id="256"/>
             <p14:sldId id="257"/>
           </p14:sldIdLst>
         </p14:section>
-        <p14:section name="Funzioni booleane" id="{8d10bba1-39ec-1c2b-e777-37ea1a336ed4}">
+        <p14:section name="Funzioni booleane" id="{805d1acf-e504-4aed-ca9f-69e9c610e0db}">
           <p14:sldIdLst>
             <p14:sldId id="258"/>
             <p14:sldId id="259"/>
@@ -142,14 +142,14 @@
             <p14:sldId id="263"/>
           </p14:sldIdLst>
         </p14:section>
-        <p14:section name="Forme canoniche" id="{588ad467-a63a-5940-5753-67f3672daa1e}">
+        <p14:section name="Forme canoniche" id="{b5e6cf81-4e1f-d2aa-da58-6417bc093a55}">
           <p14:sldIdLst>
             <p14:sldId id="264"/>
             <p14:sldId id="265"/>
             <p14:sldId id="266"/>
           </p14:sldIdLst>
         </p14:section>
-        <p14:section name="Mappe di Karnaugh" id="{b9fac1b2-6965-1b3e-b1a4-d2f26a268ea3}">
+        <p14:section name="Mappe di Karnaugh" id="{3f1aa365-ad8b-223a-9be5-5bbdbb618b13}">
           <p14:sldIdLst>
             <p14:sldId id="267"/>
             <p14:sldId id="268"/>
@@ -157,7 +157,7 @@
             <p14:sldId id="270"/>
           </p14:sldIdLst>
         </p14:section>
-        <p14:section name="Ritorno alla macchina" id="{2aff54bd-434f-ee7b-e67c-0a4ed1c43a21}">
+        <p14:section name="Ritorno alla macchina" id="{76080ccd-101b-8288-3ef8-06c300d76e44}">
           <p14:sldIdLst>
             <p14:sldId id="271"/>
             <p14:sldId id="272"/>

--- a/it/slides/09-Architettura_dei_Calcolatori-Algebra_di_Boole_2.pptx
+++ b/it/slides/09-Architettura_dei_Calcolatori-Algebra_di_Boole_2.pptx
@@ -126,13 +126,13 @@
   <p:extLst>
     <p:ext uri="{521415D9-36F7-43E2-AB2F-B90AF26B5E84}">
       <p14:sectionLst xmlns:p14="http://schemas.microsoft.com/office/powerpoint/2010/main">
-        <p14:section name="Apertura" id="{04e3c99c-c835-f128-f26c-68d823ff2c09}">
+        <p14:section name="Apertura" id="{997feefd-a978-112a-87c6-57ea37e58884}">
           <p14:sldIdLst>
             <p14:sldId id="256"/>
             <p14:sldId id="257"/>
           </p14:sldIdLst>
         </p14:section>
-        <p14:section name="Funzioni booleane" id="{805d1acf-e504-4aed-ca9f-69e9c610e0db}">
+        <p14:section name="Funzioni booleane" id="{51bcb079-f2be-82b3-2bcc-a973b8342c3d}">
           <p14:sldIdLst>
             <p14:sldId id="258"/>
             <p14:sldId id="259"/>
@@ -142,14 +142,14 @@
             <p14:sldId id="263"/>
           </p14:sldIdLst>
         </p14:section>
-        <p14:section name="Forme canoniche" id="{b5e6cf81-4e1f-d2aa-da58-6417bc093a55}">
+        <p14:section name="Forme canoniche" id="{1072ee59-7f23-8b2d-1b0c-b5432f889fd4}">
           <p14:sldIdLst>
             <p14:sldId id="264"/>
             <p14:sldId id="265"/>
             <p14:sldId id="266"/>
           </p14:sldIdLst>
         </p14:section>
-        <p14:section name="Mappe di Karnaugh" id="{3f1aa365-ad8b-223a-9be5-5bbdbb618b13}">
+        <p14:section name="Mappe di Karnaugh" id="{04ee060a-ea72-c0cd-74d7-493e311479b6}">
           <p14:sldIdLst>
             <p14:sldId id="267"/>
             <p14:sldId id="268"/>
@@ -157,7 +157,7 @@
             <p14:sldId id="270"/>
           </p14:sldIdLst>
         </p14:section>
-        <p14:section name="Ritorno alla macchina" id="{76080ccd-101b-8288-3ef8-06c300d76e44}">
+        <p14:section name="Ritorno alla macchina" id="{82e96a4e-df58-1654-651d-dfcdc78feab2}">
           <p14:sldIdLst>
             <p14:sldId id="271"/>
             <p14:sldId id="272"/>
@@ -570,7 +570,7 @@
           <a:p>
             <a:r>
               <a:rPr lang="en-US" dirty="0"/>
-              <a:t>La lezione precedente vi ha dato operatori e proprietà. Questa risponde alla domanda pratica che ne segue: dato ciò che un circuito deve fare, come si trovano le porte? La risposta è un metodo in tre passi, tabella di verità, forma canonica e minimizzazione, e lo applicherete al circuito più importante del corso, l'addizionatore. La lezione si apre con due istruzioni che sommano due bit, e si chiude con i trentadue sommatori che eseguono ogni add che avete scritto.
+              <a:t>La lezione precedente ha fornito operatori e proprietà. Questa affronta la domanda pratica che ne segue: dato ciò che un circuito deve fare, come se ne trovano le porte? La risposta è un metodo in tre passi, tavola di verità, forma canonica e minimizzazione, applicato al circuito più importante del corso, il sommatore. La lezione si apre con due istruzioni che sommano due bit e si chiude con i trentadue sommatori che eseguono ogni add scritto finora. Passa così dall'algebra come calcolo all'algebra come metodo di progetto.
 Stato di apprendimento: DA COMPRENDERE OGGI, alla fine di questa lezione lo spiegate, lo seguite passo passo e lo applicate da soli; DA UTILIZZARE OGGI, oggi seguite e usate la ricetta; come funziona dentro si spiega più avanti, o non fa parte del corso; DA COMPRENDERE PIÙ AVANTI, riconoscete il nome e lo scopo; lo spiega una lezione successiva. Una slide senza etichetta è contesto: una storia, un esempio, una domanda, un esercizio.
 Stato di apprendimento di questa lezione. DA COMPRENDERE OGGI: il sommatore; le funzioni booleane; le forme canoniche; minimizzazione, Karnaugh. DA UTILIZZARE OGGI: il programma completo, gli strumenti di PRG32 (si usa, non si studia, in questo corso). DA COMPRENDERE PIÙ AVANTI: niente. Una slide senza etichetta è contesto: una storia, un esempio, una domanda, un esercizio.
 Per il docente: Spirale: la lezione si apre con due istruzioni che sommano due bit, mostra che sono un semisommatore, sviluppa poi il metodo (tabella di verità, forma canonica, minimizzazione) che produce circuiti del genere, e si chiude sull'addizionatore a 32 bit che sta dietro l'istruzione add.</a:t>
@@ -661,7 +661,7 @@
           <a:p>
             <a:r>
               <a:rPr lang="en-US" dirty="0"/>
-              <a:t>La ricetta applicata a F. Per ogni riga in cui F vale 1 si scrive il suo mintermine; l'OR di questi mintermini è la forma canonica P: F è la somma dei mintermini 3, 4, 5, 6 e 7. Per ogni riga in cui F vale 0 si scrive il suo maxtermine; l'AND di questi maxtermini è la forma canonica S: il prodotto dei maxtermini 0, 1 e 2. Entrambe le espressioni sono corrette e uniche. Nessuna è economica: la prima ha cinque clausole e quindici letterali.
+              <a:t>Il procedimento applicato a F. Per ogni riga in cui F vale 1 si scrive il suo mintermine, e l'OR di questi mintermini è la forma canonica P: F è la somma dei mintermini 3, 4, 5, 6 e 7. Per ogni riga in cui F vale 0 si scrive il suo maxtermine, e l'AND di questi maxtermini è la forma canonica S: il prodotto dei maxtermini 0, 1 e 2. Entrambe le espressioni sono corrette e uniche, il che ne fa il valore teorico; nessuna delle due è economica, perché la prima ha cinque clausole e quindici letterali.
 DA COMPRENDERE OGGI: le forme canoniche.
 Per il docente: Ogni funzione ha una e una sola forma canonica per tipo (a meno dell'ordine dei termini). È sintesi a ricetta: sempre possibile, raramente economica.</a:t>
             </a:r>
@@ -751,7 +751,7 @@
           <a:p>
             <a:r>
               <a:rPr lang="en-US" dirty="0"/>
-              <a:t>La forma canonica di F ridotta passo per passo con le leggi della Lezione 08. Si raccoglie A da quattro clausole; si raccoglie di nuovo dentro la parentesi; si applica due volte la legge del complemento; infine si applica la semplificazione x + x'y = x + y. Quindici letterali diventano tre: F = A + BC. Funziona, ma notate ciò che dice la didascalia: a ogni passo bisognava vedere quale legge applicare. Per una funzione più grande non è praticabile. Serve un metodo che non dipenda dall'ispirazione.
+              <a:t>La forma canonica di F ridotta passo per passo con le leggi della Lezione 08. Si raccoglie A da quattro clausole; si raccoglie di nuovo dentro la parentesi; si applica due volte la legge del complemento; infine la semplificazione x + x'y = x + y. Quindici letterali diventano tre: F = A + BC. Il metodo funziona, ma la didascalia ne indica il punto debole: a ogni passo bisognava vedere quale legge applicare. Per funzioni più grandi questo è impraticabile, e serve un metodo indipendente dall'intuizione.
 DA COMPRENDERE OGGI: le forme canoniche.
 Per il docente: Da cinque porte AND a tre ingressi e una OR a cinque ingressi, a una AND e una OR. La presentazione originale la chiamava minimizzazione «empirica»: funziona, ma quale legge applicare al passo successivo è lasciato all'intuito. Le mappe di Karnaugh la rendono meccanica.</a:t>
             </a:r>
@@ -841,7 +841,7 @@
           <a:p>
             <a:r>
               <a:rPr lang="en-US" dirty="0"/>
-              <a:t>Una mappa di Karnaugh è la tabella di verità ridisegnata come griglia, con una cella per ogni riga. Il punto essenziale è l'ordine delle celle: due celle vicine differiscono nel valore di una sola variabile, ed è per questo che le colonne sono etichettate 00, 01, 11, 10 e non nell'ordine del conteggio. Grazie a ciò due 1 adiacenti si possono fondere in un'unica clausola con un letterale in meno. La regola: si raggruppano gli 1 in rettangoli di 1, 2, 4 o 8 celle, i più grandi possibile, finché ogni 1 è coperto. Anche i bordi sinistro e destro sono adiacenti.
+              <a:t>Una mappa di Karnaugh è la tavola di verità ridisegnata come griglia, una cella per riga. La sua caratteristica essenziale è l'ordine delle celle: due celle vicine qualsiasi differiscono nel valore di esattamente una variabile, ed è per questo che le colonne sono etichettate 00, 01, 11, 10 (un codice Gray) e non in ordine di conteggio. Di conseguenza due 1 adiacenti si possono fondere in una sola clausola con un letterale in meno, grazie alla legge xy + xy' = x. La regola è raggruppare gli 1 in rettangoli di 1, 2, 4 o 8 celle, ciascuno il più grande possibile, finché ogni 1 è coperto. Anche i bordi sinistro e destro sono adiacenti.
 DA COMPRENDERE OGGI: minimizzazione, Karnaugh.
 Per il docente: L'ordine 00, 01, 11, 10 è un codice Gray. Maurice Karnaugh, 1953. La presentazione originale suggeriva uno strumento online (edutecnica.it/apps/k/k.htm).</a:t>
             </a:r>
@@ -931,7 +931,7 @@
           <a:p>
             <a:r>
               <a:rPr lang="en-US" dirty="0"/>
-              <a:t>La funzione F della lezione su una mappa di tre variabili. Si scrive 1 nelle celle dei mintermini 3, 4, 5, 6 e 7. Il gruppo rosso prende l'intera riga A = 1, quattro celle: cambiano due variabili, B e C, e la clausola è A. Il gruppo viola prende la colonna BC = 11: A cambia, e la clausola è BC. Ogni 1 è coperto e nessun gruppo si può allargare: F = A + BC. È il risultato della minimizzazione algebrica, trovato a occhio in pochi secondi.
+              <a:t>La funzione F posta su una mappa a tre variabili. Si scrive 1 nelle celle dei mintermini 3, 4, 5, 6 e 7. Il gruppo rosso copre l'intera riga A = 1, quattro celle in cui variano sia B sia C, quindi la clausola è A. Il gruppo viola copre la colonna BC = 11, in cui varia A, quindi la clausola è BC. Ogni 1 è coperto e nessun gruppo si può allargare: F = A + BC. È il risultato della minimizzazione algebrica, ottenuto a colpo d'occhio in pochi secondi.
 DA COMPRENDERE OGGI: minimizzazione, Karnaugh.
 Per il docente: Un gruppo di 2^k celle elimina k variabili. Si prendono sempre prima i gruppi più grandi, poi si copre ciò che resta.</a:t>
             </a:r>
@@ -1021,7 +1021,7 @@
           <a:p>
             <a:r>
               <a:rPr lang="en-US" dirty="0"/>
-              <a:t>Con quattro variabili la mappa ha sedici celle, ed entrambe le coppie di etichette seguono l'ordine 00, 01, 11, 10. Il gruppo rosso di quattro al centro dà BD. Anche i quattro angoli formano un solo gruppo, perché la mappa si richiude nelle due direzioni: immaginatela disegnata sulla superficie di una ciambella. Negli angoli B e D valgono entrambe 0, quindi la clausola è B'D'. Il risultato ha quattro letterali invece di trentadue. Guardate sempre bordi e angoli prima di concludere che un 1 è isolato.
+              <a:t>Con quattro variabili la mappa ha sedici celle, ed entrambi gli insiemi di etichette seguono l'ordine 00, 01, 11, 10. Il gruppo rosso centrale di quattro dà BD. Anche i quattro angoli formano un gruppo, perché la mappa si richiude in entrambe le direzioni, come se fosse disegnata sulla superficie di un toro. Negli angoli B e D valgono entrambi 0, quindi la clausola è B'D'. Il risultato ha quattro letterali invece di trentadue. Prima di concludere che un 1 è isolato, vanno sempre esaminati i bordi e gli angoli.
 DA COMPRENDERE OGGI: minimizzazione, Karnaugh.
 Per il docente: Slide nuova. Si pensi alla mappa come disegnata su un toro: il bordo superiore tocca quello inferiore e il sinistro tocca il destro.</a:t>
             </a:r>
@@ -1111,7 +1111,7 @@
           <a:p>
             <a:r>
               <a:rPr lang="en-US" dirty="0"/>
-              <a:t>A volte una combinazione di ingressi non può mai presentarsi, oppure quando si presenta l'uscita non importa. Una cifra decimale codificata su quattro bit usa solo dieci delle sedici configurazioni: le altre sei non compaiono mai. Le loro celle si segnano con una x, una condizione di indifferenza, e ogni x si può leggere come 1 o come 0, a seconda di ciò che conviene. Usate una x come 1 quando permette di allargare un gruppo; ignoratela altrimenti. Più libertà significa gruppi più grandi e un circuito più economico.
+              <a:t>Alcune combinazioni di ingresso non possono mai presentarsi, oppure la loro uscita è irrilevante quando si presentano. Una cifra decimale codificata su quattro bit usa solo dieci delle sedici configurazioni, e le altre sei non compaiono mai. Le loro celle si marcano con x, una condizione di indifferenza, e ogni x si può trattare come 1 o come 0, come conviene: come 1 quando allarga un gruppo, e altrimenti la si ignora. Più libertà significa gruppi più grandi e quindi un circuito più economico. La Lezione 11 incontra questa situazione nel codice BCD e nel display a sette segmenti.
 DA COMPRENDERE OGGI: minimizzazione, Karnaugh.
 Per il docente: Slide nuova. Tipico esercizio d'esame: il decodificatore per display a sette segmenti, dove ogni segmento è una funzione di quattro variabili con sei indifferenze.</a:t>
             </a:r>
@@ -1201,7 +1201,7 @@
           <a:p>
             <a:r>
               <a:rPr lang="en-US" dirty="0"/>
-              <a:t>Mettete in fila trentadue sommatori completi, uno per posizione di bit. Ognuno riceve un bit di A, un bit di B e il riporto dalla posizione alla sua destra, e passa il proprio riporto a sinistra: un sommatore a propagazione del riporto. È ciò che esegue add t2, t0, t1. Il primo riporto entrante è 0. Per una sottrazione si usa lo stesso addizionatore: il secondo operando è complementato e il primo riporto entrante è 1, cioè il complemento a due della Lezione 05. Il riporto uscente dall'ultima posizione viene semplicemente scartato.
+              <a:t>Si mettono in fila trentadue sommatori completi, uno per posizione di bit. Ciascuno riceve un bit di A, un bit di B e il riporto dalla posizione alla sua destra, e passa il proprio riporto a sinistra: è un sommatore a propagazione del riporto, ed è ciò che esegue add t2, t0, t1. Il primo riporto entrante vale 0. La sottrazione usa lo stesso sommatore: il secondo operando si complementa e il primo riporto entrante si pone a 1, che è esattamente il cambio di segno in complemento a due della Lezione 05. Il riporto uscente dall'ultima posizione si scarta. Il riporto deve attraversare tutti e trentadue gli stadi, un ritardo le cui conseguenze esamina la Lezione 11.
 DA COMPRENDERE OGGI: il sommatore.
 Per il docente: Il riporto uscente dal bit 31 è l'overflow senza segno della Lezione 05, che RISC-V semplicemente scarta. I processori reali usano schemi di riporto più veloci (carry look-ahead), ma la funzione calcolata è la stessa.</a:t>
             </a:r>
@@ -1291,8 +1291,8 @@
           <a:p>
             <a:r>
               <a:rPr lang="en-US" dirty="0"/>
-              <a:t>Usate la formula del numero di funzioni con n uguale a 3. Prima l'esponente: 2 alla 3 fa 8, il numero di righe della tabella di verità; poi 2 alla 8.
-Scrivete 5 in binario su tre bit: 101. In un mintermine una variabile compare diretta dove la riga ha un 1 e complementata dove ha uno 0. Scartate subito l'opzione con i segni più: è una somma, quindi non può essere un mintermine.
+              <a:t>Per la prima domanda si applica la formula del numero di funzioni con n = 3, valutando prima l'esponente: 2^3 = 8 è il numero di righe della tavola di verità, e la risposta è 2^8.
+Per la seconda, 5 si scrive in binario su tre bit, 101. In un mintermine una variabile compare non complementata dove la riga ha 1 e complementata dove ha 0. L'opzione che contiene segni più si può scartare subito: è una somma e quindi non può essere un mintermine.
 Per il docente: 1. Risposta: D. 2^(2^3) = 2^8 = 256.
 2. Risposta: B. La riga 5 è 101: A = 1, B = 0, C = 1, quindi il mintermine è A B' C.</a:t>
             </a:r>
@@ -1382,8 +1382,8 @@
           <a:p>
             <a:r>
               <a:rPr lang="en-US" dirty="0"/>
-              <a:t>Un gruppo di 2 alla k celle elimina k variabili. Quattro è 2 al quadrato. Verificatelo sulla mappa di tre variabili: la riga di quattro 1 ha perso sia B sia C.
-Guardate la tabella del sommatore completo. Il riporto uscente vale 1 nelle righe con due o tre 1 tra gli ingressi: è la funzione di maggioranza. «Un numero dispari di 1» descrive l'altra uscita, il bit di somma.
+              <a:t>Per la prima domanda: un gruppo di 2^k celle elimina k variabili, e quattro è 2^2. La mappa a tre variabili lo conferma: la riga di quattro 1 ha perso sia B sia C.
+Per la seconda si consulta la tavola del sommatore completo. Il riporto uscente vale 1 nelle righe con due o tre 1 tra gli ingressi: è la funzione di maggioranza. "Un numero dispari di 1" descrive l'altra uscita, il bit di somma.
 Per il docente: 1. Risposta: B. Un gruppo di 2^k celle elimina k variabili: quattro celle, due variabili.
 2. Risposta: C. Cout è la funzione di maggioranza: AB + Cin(A xor B) = AB + ACin + BCin. Un numero dispari di 1 descrive invece il bit di somma S.</a:t>
             </a:r>
@@ -1473,7 +1473,7 @@
           <a:p>
             <a:r>
               <a:rPr lang="en-US" dirty="0"/>
-              <a:t>Dodici termini. In italiano le forme canoniche si indicano con le lettere P, per prodotti, e S, per somme; i testi inglesi dicono SOP e POS. Half adder è il semisommatore e full adder il sommatore completo. Don't care è la condizione di indifferenza. Il ripple-carry adder è il sommatore in cui il riporto si propaga da una posizione alla successiva.</a:t>
+              <a:t>Dodici termini. In italiano le forme canoniche si indicano con P, per prodotti, e S, per somme; i testi inglesi usano SOP e POS. L'half adder è il semisommatore, il full adder il sommatore completo. Un don't care è una condizione di indifferenza. Il ripple-carry adder è il sommatore in cui il riporto si propaga da ogni posizione alla successiva.</a:t>
             </a:r>
             <a:endParaRPr lang="en-US" dirty="0"/>
           </a:p>
@@ -1561,7 +1561,7 @@
           <a:p>
             <a:r>
               <a:rPr lang="en-US" dirty="0"/>
-              <a:t>Cinque obiettivi. Conoscere il vocabolario: letterale, clausola, fattore, mintermine, maxtermine. Dire quante funzioni booleane di n variabili esistono. Scrivere una funzione nelle due forme canoniche a partire dalla tabella di verità. Minimizzare una funzione fino a quattro variabili con una mappa di Karnaugh: è l'abilità più esercitata dalla prova intercorso e dal laboratorio. E ricavare semisommatore e sommatore completo, spiegando come trentadue di essi svolgono un'addizione.</a:t>
+              <a:t>Cinque risultati di apprendimento. Padroneggiare il lessico: letterale, clausola, fattore, mintermine, maxtermine. Dire quante funzioni booleane di n variabili esistono. Scrivere una funzione in entrambe le forme canoniche a partire dalla sua tavola di verità. Minimizzare una funzione di al più quattro variabili con una mappa di Karnaugh, l'abilità più esercitata dalla prova intercorso e dal laboratorio. E ricavare il semisommatore e il sommatore completo, spiegando poi come trentadue di essi eseguono un'addizione.</a:t>
             </a:r>
             <a:endParaRPr lang="en-US" dirty="0"/>
           </a:p>
@@ -1649,7 +1649,7 @@
           <a:p>
             <a:r>
               <a:rPr lang="en-US" dirty="0"/>
-              <a:t>Cinque conclusioni. Una funzione booleana è una tabella di verità, e una tabella di verità dà sempre un'espressione canonica. La minimizzazione ottimizza la rete per renderla più economica. Le mappe di Karnaugh trasformano l'algebra in una figura: si raggruppano gli 1 e si leggono le clausole. Il semisommatore e il sommatore completo sono i primi veri circuiti del corso. E trentadue sommatori completi in fila eseguono la add che avete scritto nella prima lezione. A seguire: di che cosa sono fatte le porte.
+              <a:t>Cinque conclusioni. Una funzione booleana è una tavola di verità, e una tavola di verità dà sempre un'espressione canonica. La minimizzazione ottimizza la rete e ne riduce il costo. Le mappe di Karnaugh trasformano l'algebra in un procedimento visivo: si raggruppano gli 1 e si leggono le clausole. Il semisommatore e il sommatore completo sono i primi veri circuiti del corso. E trentadue sommatori completi in fila eseguono l'add scritto nella prima lezione di programmazione. La prossima lezione si chiede di che cosa sono fatte le porte stesse.
 Stato di apprendimento, riepilogo. DA COMPRENDERE OGGI: il sommatore; le funzioni booleane; le forme canoniche; minimizzazione, Karnaugh. DA UTILIZZARE OGGI: il programma completo, gli strumenti di PRG32 (si usa, non si studia, in questo corso). DA COMPRENDERE PIÙ AVANTI: niente. Una slide senza etichetta è contesto: una storia, un esempio, una domanda, un esercizio.
 Per il docente: Prossima lezione: l'elettronica, per vedere di che cosa sono fatte queste porte; poi le macchine combinatorie e sequenziali.</a:t>
             </a:r>
@@ -1739,7 +1739,7 @@
           <a:p>
             <a:r>
               <a:rPr lang="en-US" dirty="0"/>
-              <a:t>Tre parole. Un letterale è una variabile o il suo complemento così come compare in un'espressione: a, b', x. Una clausola, o termine prodotto, è un prodotto logico di letterali: a b' x. Un fattore, o termine somma, è una somma logica di letterali: (a + x'). Il numero di letterali misura il costo di un'espressione, perché ogni occorrenza di una variabile è l'ingresso di una porta. Conterete i letterali per confrontare due forme della stessa funzione.
+              <a:t>Tre termini. Un letterale è una variabile, o il suo complemento, così come compare in un'espressione: a, b', x. Una clausola, o termine prodotto, è un prodotto logico di letterali: a b' x. Un fattore, o termine somma, è una somma logica di letterali: (a + x'). Il numero dei letterali è una prima misura del costo di un'espressione, perché ogni occorrenza di una variabile è l'ingresso di qualche porta; contare i letterali è il modo in cui si confronteranno due forme della stessa funzione.
 DA COMPRENDERE OGGI: le funzioni booleane.
 Per il docente: In inglese: literal; clause o product term; factor o sum term. Ogni occorrenza di una variabile conta come un letterale: il numero di letterali misura il costo di un'espressione.</a:t>
             </a:r>
@@ -1829,7 +1829,7 @@
           <a:p>
             <a:r>
               <a:rPr lang="en-US" dirty="0"/>
-              <a:t>Una funzione booleana assegna uno 0 o un 1 a ogni combinazione dei suoi n ingressi. Le combinazioni sono 2 alla n, e per ciascuna ci sono due uscite possibili: le funzioni sono quindi 2 elevato a 2 alla n. Con una variabile sono 4, con due 16, con tre 256, con quattro 65.536. Il numero è finito ma cresce con estrema rapidità. L'ultima riga è la ragione per cui si studia tutto questo: ogni circuito digitale si può scrivere come espressione, e ogni espressione si può realizzare come circuito.
+              <a:t>Una funzione booleana assegna 0 o 1 a ogni combinazione dei suoi n ingressi. Le combinazioni sono 2^n, e per ciascuna ci sono due uscite possibili, quindi il numero di funzioni distinte è 2^(2^n): 4 per una variabile, 16 per due, 256 per tre, 65.536 per quattro. Il numero è finito ma cresce in modo doppiamente esponenziale. L'ultima riga dice perché l'argomento conta: ogni circuito digitale si può scrivere come espressione booleana, e ogni espressione booleana si può costruire come circuito. La corrispondenza tra algebra e hardware è esatta.
 DA COMPRENDERE OGGI: le funzioni booleane.
 Per il docente: f: B^n -&gt; B con B = {0, 1}. Per n = 5 le funzioni sono già più di quattro miliardi: 2^32.</a:t>
             </a:r>
@@ -1919,7 +1919,7 @@
           <a:p>
             <a:r>
               <a:rPr lang="en-US" dirty="0"/>
-              <a:t>Tutte e sedici le funzioni di due variabili. Ogni riga è una funzione, e le quattro colonne centrali sono le sue uscite per gli ingressi 00, 01, 10 e 11; il numero della funzione è quella colonna di uscite letta come numero binario. Tra esse riconoscete, evidenziate, le porte della Lezione 08: AND è f1, XOR è f6, OR è f7, NOR è f8, XNOR è f9, NAND è f14. Le altre sono le due costanti, i due ingressi lasciati passare invariati, le loro negazioni, e quattro funzioni meno comuni.
+              <a:t>Tutte le sedici funzioni di due variabili. Ogni riga è una funzione, le quattro colonne centrali ne danno le uscite per gli ingressi 00, 01, 10 e 11; l'indice della funzione è quella colonna di uscite letta come numero binario. Tra esse compaiono, evidenziate, le porte della Lezione 08: AND è f1, XOR è f6, OR è f7, NOR è f8, XNOR è f9, NAND è f14. Le restanti sono le due costanti, i due ingressi riportati invariati, le loro negazioni e quattro funzioni meno comuni, come l'implicazione.
 DA COMPRENDERE OGGI: le funzioni booleane.
 Per il docente: f0 e f15: costanti. f3, f5: identità (buffer). f12, f10: NOT. f1 AND, f7 OR, f6 XOR, f9 equivalenza, f14 NAND, f8 NOR. f13 è l'implicazione x -&gt; y, f11 è y -&gt; x; f2 e f4 sono le inibizioni.</a:t>
             </a:r>
@@ -2009,7 +2009,7 @@
           <a:p>
             <a:r>
               <a:rPr lang="en-US" dirty="0"/>
-              <a:t>Un insieme di operatori è funzionalmente completo se con esso si può costruire ogni funzione booleana. AND, OR e NOT sono completi. Per le leggi di De Morgan uno tra AND e OR si ottiene dall'altro con NOT, quindi bastano due operatori. Il fatto sorprendente è l'ultimo: NAND da solo è completo, e così NOR da solo. Un solo tipo di porta basta a costruire qualunque circuito digitale, un intero processore compreso; per questo NAND e NOR si chiamano porte universali.
+              <a:t>Un insieme di operatori è funzionalmente completo se ogni funzione booleana si può esprimere con esso soltanto. AND, OR e NOT formano un insieme completo. Poiché le leggi di De Morgan permettono di ottenere AND o OR l'uno dall'altro con l'aiuto di NOT, bastano due operatori. Il fatto notevole viene per ultimo: NAND da solo è completo, e così NOR da solo. Un solo tipo di porta basta a costruire qualsiasi circuito digitale, un intero processore compreso, ed è per questo che NAND e NOR si chiamano porte universali. La Lezione 10 mostra perché questo conta dal punto di vista economico.
 DA COMPRENDERE OGGI: le funzioni booleane.
 Per il docente: NOT x = x NAND x; x AND y = (x NAND y) NAND (x NAND y); x OR y = (x NAND x) NAND (y NAND y). I chip reali sono fatti in gran parte di NAND e NOR perché richiedono meno transistor.</a:t>
             </a:r>
@@ -2099,7 +2099,7 @@
           <a:p>
             <a:r>
               <a:rPr lang="en-US" dirty="0"/>
-              <a:t>Il semisommatore somma due bit A e B e produce un bit di somma S e un riporto C. Dalla tabella, S vale 1 quando gli ingressi sono diversi, cioè lo XOR, e C vale 1 quando entrambi valgono 1, cioè l'AND. Il circuito a destra è esattamente la coppia di istruzioni del riscaldamento. Si chiama «semi» perché non ha un ingresso per il riporto proveniente da una posizione precedente, quindi da solo può sommare soltanto i bit meno significativi di due numeri.
+              <a:t>Il semisommatore somma due bit A e B e produce un bit di somma S e un riporto C. La tavola di verità mostra che S vale 1 quando gli ingressi differiscono, cioè XOR, e che C vale 1 quando entrambi valgono 1, cioè AND. Il circuito a destra corrisponde esattamente alle due istruzioni del riscaldamento. Si chiama "semi" perché non ha un ingresso per il riporto da una posizione meno significativa, quindi da solo può sommare solo i bit meno significativi di due numeri.
 DA COMPRENDERE OGGI: il sommatore.
 Per il docente: Il circuito è esattamente la coppia di istruzioni del riscaldamento. «Semi» perché non ha un riporto in ingresso: può sommare solo i bit meno significativi.</a:t>
             </a:r>
@@ -2189,7 +2189,7 @@
           <a:p>
             <a:r>
               <a:rPr lang="en-US" dirty="0"/>
-              <a:t>Il sommatore completo ha tre ingressi: i due bit A e B e un riporto entrante. Produce un bit di somma e un riporto uscente. Leggete la tabella: S vale 1 quando è a 1 un numero dispari di ingressi; il riporto uscente vale 1 quando almeno due ingressi sono a 1. Il circuito è fatto di due semisommatori e un OR: il primo somma A e B, il secondo somma il riporto entrante alla loro somma, e l'OR combina i due possibili riporti. Nel disegno i fili che si incrociano senza un punto non sono collegati.
+              <a:t>Il sommatore completo ha tre ingressi, i due bit degli operandi A e B e un riporto entrante, e due uscite, un bit di somma e un riporto uscente. Dalla tavola, S vale 1 quando un numero dispari di ingressi vale 1, e il riporto uscente vale 1 quando almeno due ingressi valgono 1. Il circuito consiste di due semisommatori e di una porta OR: il primo somma A e B, il secondo somma il riporto entrante alla loro somma parziale, e l'OR fonde i due riporti possibili, che non possono mai valere 1 entrambi. Nel disegno, fili che si incrociano senza un punto non sono collegati.
 DA COMPRENDERE OGGI: il sommatore.
 Per il docente: Due semisommatori e un OR. S vale 1 quando è a 1 un numero dispari di ingressi; Cout vale 1 quando almeno due ingressi sono a 1. I fili che si incrociano senza un punto non sono collegati.</a:t>
             </a:r>
@@ -2279,7 +2279,7 @@
           <a:p>
             <a:r>
               <a:rPr lang="en-US" dirty="0"/>
-              <a:t>Un mintermine è un prodotto che contiene ogni variabile una volta, complementata o no. La sua proprietà speciale è di valere 1 per una e una sola riga della tabella di verità: a'b'c vale 1 solo quando a è 0, b è 0 e c è 1. Un maxtermine è una somma che contiene ogni variabile una volta, e vale 0 per una e una sola riga. Per scrivere il mintermine di una riga si complementano le variabili che in quella riga valgono 0; per il maxtermine, quelle che valgono 1.
+              <a:t>Un mintermine è un prodotto che contiene ogni variabile esattamente una volta, complementata o no. La sua proprietà caratteristica è di valere 1 per una sola riga della tavola di verità: a'b'c vale 1 solo quando a = 0, b = 0 e c = 1. Un maxtermine è una somma che contiene ogni variabile esattamente una volta, e vale 0 per una sola riga. Per scrivere il mintermine di una riga si complementano le variabili che in quella riga valgono 0; per il maxtermine, quelle che valgono 1. Mintermini e maxtermini sono i mattoni delle forme canoniche.
 DA COMPRENDERE OGGI: le forme canoniche.
 Per il docente: In inglese: minterm (termine prodotto P); maxterm (fattore somma S). Il mintermine i corrisponde alla riga i: una variabile compare complementata dove la riga ha uno 0.</a:t>
             </a:r>
@@ -3359,7 +3359,7 @@
                 <a:ea typeface="Calibri" pitchFamily="34" charset="-122"/>
                 <a:cs typeface="Calibri" pitchFamily="34" charset="-120"/>
               </a:rPr>
-              <a:t>09-Architettura_dei_Calcolatori-Algebra_di_Boole_2-Codice.pptx</a:t>
+              <a:t>09-Architettura_dei_Calcolatori-Algebra_di_Boole_2-Lab.pptx</a:t>
             </a:r>
             <a:endParaRPr lang="en-US" sz="1300" dirty="0"/>
           </a:p>

--- a/it/slides/09-Architettura_dei_Calcolatori-Algebra_di_Boole_2.pptx
+++ b/it/slides/09-Architettura_dei_Calcolatori-Algebra_di_Boole_2.pptx
@@ -126,13 +126,13 @@
   <p:extLst>
     <p:ext uri="{521415D9-36F7-43E2-AB2F-B90AF26B5E84}">
       <p14:sectionLst xmlns:p14="http://schemas.microsoft.com/office/powerpoint/2010/main">
-        <p14:section name="Apertura" id="{997feefd-a978-112a-87c6-57ea37e58884}">
+        <p14:section name="Apertura" id="{18c3529c-304e-2097-137a-f79e77b7443c}">
           <p14:sldIdLst>
             <p14:sldId id="256"/>
             <p14:sldId id="257"/>
           </p14:sldIdLst>
         </p14:section>
-        <p14:section name="Funzioni booleane" id="{51bcb079-f2be-82b3-2bcc-a973b8342c3d}">
+        <p14:section name="Funzioni booleane" id="{1c12fc79-9489-6775-eb84-a31df9360b6b}">
           <p14:sldIdLst>
             <p14:sldId id="258"/>
             <p14:sldId id="259"/>
@@ -142,14 +142,14 @@
             <p14:sldId id="263"/>
           </p14:sldIdLst>
         </p14:section>
-        <p14:section name="Forme canoniche" id="{1072ee59-7f23-8b2d-1b0c-b5432f889fd4}">
+        <p14:section name="Forme canoniche" id="{87355ebb-9d97-16e4-5cc2-60a14da22bd1}">
           <p14:sldIdLst>
             <p14:sldId id="264"/>
             <p14:sldId id="265"/>
             <p14:sldId id="266"/>
           </p14:sldIdLst>
         </p14:section>
-        <p14:section name="Mappe di Karnaugh" id="{04ee060a-ea72-c0cd-74d7-493e311479b6}">
+        <p14:section name="Mappe di Karnaugh" id="{937a2631-893f-146a-0d55-a09fabcf9780}">
           <p14:sldIdLst>
             <p14:sldId id="267"/>
             <p14:sldId id="268"/>
@@ -157,7 +157,7 @@
             <p14:sldId id="270"/>
           </p14:sldIdLst>
         </p14:section>
-        <p14:section name="Ritorno alla macchina" id="{82e96a4e-df58-1654-651d-dfcdc78feab2}">
+        <p14:section name="Ritorno alla macchina" id="{b0a609d7-3aa7-a4fa-afaa-c4b1b04afac2}">
           <p14:sldIdLst>
             <p14:sldId id="271"/>
             <p14:sldId id="272"/>

--- a/it/slides/09-Architettura_dei_Calcolatori-Algebra_di_Boole_2.pptx
+++ b/it/slides/09-Architettura_dei_Calcolatori-Algebra_di_Boole_2.pptx
@@ -126,13 +126,13 @@
   <p:extLst>
     <p:ext uri="{521415D9-36F7-43E2-AB2F-B90AF26B5E84}">
       <p14:sectionLst xmlns:p14="http://schemas.microsoft.com/office/powerpoint/2010/main">
-        <p14:section name="Apertura" id="{18c3529c-304e-2097-137a-f79e77b7443c}">
+        <p14:section name="Apertura" id="{819f618b-f0e6-7ffb-e186-d4e7944d2da7}">
           <p14:sldIdLst>
             <p14:sldId id="256"/>
             <p14:sldId id="257"/>
           </p14:sldIdLst>
         </p14:section>
-        <p14:section name="Funzioni booleane" id="{1c12fc79-9489-6775-eb84-a31df9360b6b}">
+        <p14:section name="Funzioni booleane" id="{04c44e0e-dec5-a1ba-5105-91ed8d84e840}">
           <p14:sldIdLst>
             <p14:sldId id="258"/>
             <p14:sldId id="259"/>
@@ -142,14 +142,14 @@
             <p14:sldId id="263"/>
           </p14:sldIdLst>
         </p14:section>
-        <p14:section name="Forme canoniche" id="{87355ebb-9d97-16e4-5cc2-60a14da22bd1}">
+        <p14:section name="Forme canoniche" id="{8e212f34-34da-a3d5-ece6-69a24c3dfb5b}">
           <p14:sldIdLst>
             <p14:sldId id="264"/>
             <p14:sldId id="265"/>
             <p14:sldId id="266"/>
           </p14:sldIdLst>
         </p14:section>
-        <p14:section name="Mappe di Karnaugh" id="{937a2631-893f-146a-0d55-a09fabcf9780}">
+        <p14:section name="Mappe di Karnaugh" id="{b0728b0e-65da-e43c-676b-f73758351526}">
           <p14:sldIdLst>
             <p14:sldId id="267"/>
             <p14:sldId id="268"/>
@@ -157,7 +157,7 @@
             <p14:sldId id="270"/>
           </p14:sldIdLst>
         </p14:section>
-        <p14:section name="Ritorno alla macchina" id="{b0a609d7-3aa7-a4fa-afaa-c4b1b04afac2}">
+        <p14:section name="Ritorno alla macchina" id="{d1c438b7-2831-16f8-e8a4-e511d1924900}">
           <p14:sldIdLst>
             <p14:sldId id="271"/>
             <p14:sldId id="272"/>
@@ -573,6 +573,7 @@
               <a:t>La lezione precedente ha fornito operatori e proprietà. Questa affronta la domanda pratica che ne segue: dato ciò che un circuito deve fare, come se ne trovano le porte? La risposta è un metodo in tre passi, tavola di verità, forma canonica e minimizzazione, applicato al circuito più importante del corso, il sommatore. La lezione si apre con due istruzioni che sommano due bit e si chiude con i trentadue sommatori che eseguono ogni add scritto finora. Passa così dall'algebra come calcolo all'algebra come metodo di progetto.
 Stato di apprendimento: DA COMPRENDERE OGGI, alla fine di questa lezione lo spiegate, lo seguite passo passo e lo applicate da soli; DA UTILIZZARE OGGI, oggi seguite e usate la ricetta; come funziona dentro si spiega più avanti, o non fa parte del corso; DA COMPRENDERE PIÙ AVANTI, riconoscete il nome e lo scopo; lo spiega una lezione successiva. Una slide senza etichetta è contesto: una storia, un esempio, una domanda, un esercizio.
 Stato di apprendimento di questa lezione. DA COMPRENDERE OGGI: il sommatore; le funzioni booleane; le forme canoniche; minimizzazione, Karnaugh. DA UTILIZZARE OGGI: il programma completo, gli strumenti di PRG32 (si usa, non si studia, in questo corso). DA COMPRENDERE PIÙ AVANTI: niente. Una slide senza etichetta è contesto: una storia, un esempio, una domanda, un esercizio.
+Percorso. I risultati di oggi: (1) scrivere una funzione in forma canonica dalla sua tabella di verità; (2) minimizzare una funzione di al più quattro variabili con una mappa di Karnaugh; (3) costruire un sommatore completo e concatenarlo in un sommatore a n bit. Si appoggia su: solo ciò che ha preparato la Lezione 01. Prossimo passo: Lezione 10, Introduzione all'elettronica e all'elettronica digitale.
 Per il docente: Spirale: la lezione si apre con due istruzioni che sommano due bit, mostra che sono un semisommatore, sviluppa poi il metodo (tabella di verità, forma canonica, minimizzazione) che produce circuiti del genere, e si chiude sull'addizionatore a 32 bit che sta dietro l'istruzione add.</a:t>
             </a:r>
             <a:endParaRPr lang="en-US" dirty="0"/>
@@ -1650,7 +1651,7 @@
             <a:r>
               <a:rPr lang="en-US" dirty="0"/>
               <a:t>Cinque conclusioni. Una funzione booleana è una tavola di verità, e una tavola di verità dà sempre un'espressione canonica. La minimizzazione ottimizza la rete e ne riduce il costo. Le mappe di Karnaugh trasformano l'algebra in un procedimento visivo: si raggruppano gli 1 e si leggono le clausole. Il semisommatore e il sommatore completo sono i primi veri circuiti del corso. E trentadue sommatori completi in fila eseguono l'add scritto nella prima lezione di programmazione. La prossima lezione si chiede di che cosa sono fatte le porte stesse.
-Stato di apprendimento, riepilogo. DA COMPRENDERE OGGI: il sommatore; le funzioni booleane; le forme canoniche; minimizzazione, Karnaugh. DA UTILIZZARE OGGI: il programma completo, gli strumenti di PRG32 (si usa, non si studia, in questo corso). DA COMPRENDERE PIÙ AVANTI: niente. Una slide senza etichetta è contesto: una storia, un esempio, una domanda, un esercizio.
+Stato di apprendimento, riepilogo. DA COMPRENDERE OGGI: il sommatore; le funzioni booleane; le forme canoniche; minimizzazione, Karnaugh. DA UTILIZZARE OGGI: il programma completo, gli strumenti di PRG32 (si usa, non si studia, in questo corso). DA COMPRENDERE PIÙ AVANTI: niente. Una slide senza etichetta è contesto: una storia, un esempio, una domanda, un esercizio. Il filo della lezione: La add della Lezione 02 è ora un circuito che sapreste disegnare: 32 sommatori completi e un riporto che si propaga. Prossimo passo: l'elettronica che fa una porta. Biglietto d'uscita (da due a quattro minuti, da soli, su carta): 1. Un sommatore completo riceve A = 1, B = 1, Cin = 1. Date S e Cout. Perché un sommatore a 32 bit ne richiede 32, concatenati? 2. In una mappa di Karnaugh di tre variabili A, B, C, perché si possono raggruppare le celle 000 e 010, ma non 000 e 011? Quale termine dà il primo gruppo?
 Per il docente: Prossima lezione: l'elettronica, per vedere di che cosa sono fatte queste porte; poi le macchine combinatorie e sequenziali.</a:t>
             </a:r>
             <a:endParaRPr lang="en-US" dirty="0"/>
